--- a/Foundation_F1/F1-L10_Reading_Unvowelled_Text.pptx
+++ b/Foundation_F1/F1-L10_Reading_Unvowelled_Text.pptx
@@ -524,7 +524,11 @@
           <a:lstStyle/>
           <a:p>
             <a:r>
-              <a:rPr lang="en-US" dirty="0"/>
+              <a:rPr lang="ar-SA" dirty="0">
+                <a:latin typeface="Amiri" pitchFamily="2" charset="-78"/>
+                <a:ea typeface="Amiri" pitchFamily="2" charset="-78"/>
+                <a:cs typeface="Amiri" pitchFamily="2" charset="-78"/>
+              </a:rPr>
               <a:t>LESSON AT A GLANCE — planned for 56 minutes, leaving about 4 minutes for Teams delays.
 0–1 Welcome · 1–2 Lesson map · 2–9 Do Now + answers · 9–10 Objectives · 10–20 New letters and sounds · 20–23 Quick check · 23–27 I Do (formation) · 27–38 We Do (listen, sort, detect) · 38–49 You Do (write, then show-and-say) · 49–54 Feedback · 54–56 Preparation.
 FLEX slides are optional. Use them if the class is moving quickly; otherwise the same activities are on the website for homework.
@@ -802,7 +806,11 @@
           <a:lstStyle/>
           <a:p>
             <a:r>
-              <a:rPr lang="en-US" dirty="0"/>
+              <a:rPr lang="ar-SA" dirty="0">
+                <a:latin typeface="Amiri" pitchFamily="2" charset="-78"/>
+                <a:ea typeface="Amiri" pitchFamily="2" charset="-78"/>
+                <a:cs typeface="Amiri" pitchFamily="2" charset="-78"/>
+              </a:rPr>
               <a:t>I DO — THE VOWEL LADDER (website Part 3). Read Level 1, cover it, reread Levels 2 and 3. The letters never change; only the scaffolding is removed.
 Anchors (website): فُندق keeps the less predictable opening فُـ; مَطْعم keeps the closed chunk مَطْـ. Point to the skeleton (م ط ع م) at every level — the anchor helps pronunciation; it does not replace letter analysis.
 If the final read is uncertain, go back ONE step — not to permanent transliteration (website).</a:t>
@@ -892,7 +900,11 @@
           <a:lstStyle/>
           <a:p>
             <a:r>
-              <a:rPr lang="en-US" dirty="0"/>
+              <a:rPr lang="ar-SA" dirty="0">
+                <a:latin typeface="Amiri" pitchFamily="2" charset="-78"/>
+                <a:ea typeface="Amiri" pitchFamily="2" charset="-78"/>
+                <a:cs typeface="Amiri" pitchFamily="2" charset="-78"/>
+              </a:rPr>
               <a:t>WE DO — the website’s interactive lesson game (“Sign Scan”) as a whole-class picture match (2 min). The sentences are the website game sentences; the pictures are icons standing in for the website images.
 ● 20s: look at each picture and find ONE key word you know in each sentence → type “1_ 2_ 3_” in the chat.
 This is the most accessible task in the lesson — use it to build confidence before independent work. Core students read the sentence aloud after the answer is revealed (by invitation).
@@ -983,7 +995,11 @@
           <a:lstStyle/>
           <a:p>
             <a:r>
-              <a:rPr lang="en-US" dirty="0"/>
+              <a:rPr lang="ar-SA" dirty="0">
+                <a:latin typeface="Amiri" pitchFamily="2" charset="-78"/>
+                <a:ea typeface="Amiri" pitchFamily="2" charset="-78"/>
+                <a:cs typeface="Amiri" pitchFamily="2" charset="-78"/>
+              </a:rPr>
               <a:t>WE DO — the website’s interactive lesson game (“Sign Scan”) as a whole-class picture match (2 min). The sentences are the website game sentences; the pictures are icons standing in for the website images.
 ● 20s: look at each picture and find ONE key word you know in each sentence → type “1_ 2_ 3_” in the chat.
 This is the most accessible task in the lesson — use it to build confidence before independent work. Core students read the sentence aloud after the answer is revealed (by invitation).
@@ -1162,7 +1178,11 @@
           <a:lstStyle/>
           <a:p>
             <a:r>
-              <a:rPr lang="en-US" dirty="0"/>
+              <a:rPr lang="ar-SA" dirty="0">
+                <a:latin typeface="Amiri" pitchFamily="2" charset="-78"/>
+                <a:ea typeface="Amiri" pitchFamily="2" charset="-78"/>
+                <a:cs typeface="Amiri" pitchFamily="2" charset="-78"/>
+              </a:rPr>
               <a:t>WE DO — website “genuine ambiguity” table and game “Pattern Detective” (read the unvowelled sentence, choose the meaning of the highlighted skeleton). Sentences are teacher-made in the website style.
 Website skeletons: كتب (كَتَبَ he wrote · كُتُب books · كُتِبَ it was written), علم (عِلْم knowledge · عَلَم flag · عَلِمَ he knew), دخل (دَخَلَ he entered · دَخْل income).
 Good uncertainty language (website): “The letters allow two readings. This sentence makes one more likely because …”</a:t>
@@ -1340,7 +1360,11 @@
           <a:lstStyle/>
           <a:p>
             <a:r>
-              <a:rPr lang="en-US" dirty="0"/>
+              <a:rPr lang="ar-SA" dirty="0">
+                <a:latin typeface="Amiri" pitchFamily="2" charset="-78"/>
+                <a:ea typeface="Amiri" pitchFamily="2" charset="-78"/>
+                <a:cs typeface="Amiri" pitchFamily="2" charset="-78"/>
+              </a:rPr>
               <a:t>YOU DO — CONTEXT MISSION (website). Show the slide with the English column COVERED (or read aloud only the Arabic) for the first 3 minutes.
 Routes: Core — find five words you know and say what they mean (مدرسة، فصل، مكتبة، كتبا، الطلاب). Develop — read each sentence aloud using SCOPE. Stretch — explain كتبا (books, not “he wrote”) with evidence.
 Then reveal the support column. Website pronunciation-support version: هَذِهِ مَدْرَسَةٌ كَبِيرَةٌ. فِي الْمَدْرَسَةِ فَصْلٌ وَمَكْتَبَةٌ. يَقْرَأُ الطُّلَّابُ كُتُبًا فِي الْمَكْتَبَةِ.</a:t>
@@ -1518,7 +1542,11 @@
           <a:lstStyle/>
           <a:p>
             <a:r>
-              <a:rPr lang="en-US" dirty="0"/>
+              <a:rPr lang="ar-SA" dirty="0">
+                <a:latin typeface="Amiri" pitchFamily="2" charset="-78"/>
+                <a:ea typeface="Amiri" pitchFamily="2" charset="-78"/>
+                <a:cs typeface="Amiri" pitchFamily="2" charset="-78"/>
+              </a:rPr>
               <a:t>WELCOME (1 min) — while students join.
 • Greet each student by name as they arrive: السَّلَامُ عَلَيْكُمْ. Take the register (Pastoral Tracker: attendance 0/1).
 • 2-MINUTE CHECK-IN (SEND training): a private chat to any student who seemed unsettled last lesson — “Are you okay today? 👍 / 👎”.
@@ -1611,7 +1639,11 @@
           <a:lstStyle/>
           <a:p>
             <a:r>
-              <a:rPr lang="en-US" dirty="0"/>
+              <a:rPr lang="ar-SA" dirty="0">
+                <a:latin typeface="Amiri" pitchFamily="2" charset="-78"/>
+                <a:ea typeface="Amiri" pitchFamily="2" charset="-78"/>
+                <a:cs typeface="Amiri" pitchFamily="2" charset="-78"/>
+              </a:rPr>
               <a:t>SPEAKING REHEARSAL (3 min) — website speaking prompts (the Core prompt is teacher-made). No breakout rooms (saves setup time).
 Sequence: ● 10s think → ↔ 45s everyone rehearses their answer aloud with mic muted → ◎ pairs on open mic: name two students (warned in advance); A asks, B answers; the rest of the class types one follow-up question in chat (+ / ?) → ↺ one student summarises the answer they heard.
 Routes: Core uses the Core prompt and stem; Develop the Develop prompts; Stretch the last prompt.
@@ -2600,7 +2632,11 @@
           <a:lstStyle/>
           <a:p>
             <a:r>
-              <a:rPr lang="en-US" dirty="0"/>
+              <a:rPr lang="ar-SA" dirty="0">
+                <a:latin typeface="Amiri" pitchFamily="2" charset="-78"/>
+                <a:ea typeface="Amiri" pitchFamily="2" charset="-78"/>
+                <a:cs typeface="Amiri" pitchFamily="2" charset="-78"/>
+              </a:rPr>
               <a:t>KEY WORDS — HOW TO TEACH EACH GROUP (EAL pre-teaching routine, 7 min)
 1. HEAR IT: say the word twice, clearly, with a gesture where possible.
 2. SAY IT: choral repetition — “I say, you say” — then two volunteers.
@@ -2695,7 +2731,11 @@
           <a:lstStyle/>
           <a:p>
             <a:r>
-              <a:rPr lang="en-US" dirty="0"/>
+              <a:rPr lang="ar-SA" dirty="0">
+                <a:latin typeface="Amiri" pitchFamily="2" charset="-78"/>
+                <a:ea typeface="Amiri" pitchFamily="2" charset="-78"/>
+                <a:cs typeface="Amiri" pitchFamily="2" charset="-78"/>
+              </a:rPr>
               <a:t>WHAT STAYS (website Part 1): ✓ base letters, positional forms, dots and breaks stay; ✓ long-vowel letters ا و ي stay; ○ fatḥa, ḍamma, kasra, sukūn and tanwīn (and often shadda) disappear; ? the reader supplies the sound from vocabulary, patterns and context.
 Starter (website): English readers can often read “ths s wht Englsh lks lk wtht vwls” — but Arabic keeps its long vowels, so it is easier than that!
 HARD BOUNDARY (website): context chooses a reading of the printed letters; it cannot invent different letters — بت can never become بيت or بنت.</a:t>
@@ -3270,6 +3310,7 @@
                   <a:srgbClr val="D4AF37"/>
                 </a:solidFill>
                 <a:latin typeface="Amiri" pitchFamily="2" charset="-78"/>
+                <a:ea typeface="Amiri" pitchFamily="2" charset="-78"/>
                 <a:cs typeface="Amiri" pitchFamily="2" charset="-78"/>
               </a:rPr>
               <a:t>م</a:t>
@@ -3476,6 +3517,7 @@
                   <a:srgbClr val="D4AF37"/>
                 </a:solidFill>
                 <a:latin typeface="Amiri" pitchFamily="2" charset="-78"/>
+                <a:ea typeface="Amiri" pitchFamily="2" charset="-78"/>
                 <a:cs typeface="Amiri" pitchFamily="2" charset="-78"/>
               </a:rPr>
               <a:t>قِرَاءَةُ النُّصُوصِ غَيْرِ المَشْكُولَةِ</a:t>
@@ -3933,6 +3975,7 @@
                   <a:srgbClr val="D4AF37"/>
                 </a:solidFill>
                 <a:latin typeface="Amiri" pitchFamily="2" charset="-78"/>
+                <a:ea typeface="Amiri" pitchFamily="2" charset="-78"/>
                 <a:cs typeface="Amiri" pitchFamily="2" charset="-78"/>
               </a:rPr>
               <a:t>م</a:t>
@@ -4253,6 +4296,7 @@
                   <a:srgbClr val="8A6D1E"/>
                 </a:solidFill>
                 <a:latin typeface="Amiri" pitchFamily="2" charset="-78"/>
+                <a:ea typeface="Amiri" pitchFamily="2" charset="-78"/>
                 <a:cs typeface="Amiri" pitchFamily="2" charset="-78"/>
               </a:rPr>
               <a:t>فَحْصٌ سَرِيعٌ</a:t>
@@ -4877,6 +4921,7 @@
                   <a:srgbClr val="1B3B6F"/>
                 </a:solidFill>
                 <a:latin typeface="Amiri" pitchFamily="2" charset="-78"/>
+                <a:ea typeface="Amiri" pitchFamily="2" charset="-78"/>
                 <a:cs typeface="Amiri" pitchFamily="2" charset="-78"/>
               </a:rPr>
               <a:t>بت</a:t>
@@ -4903,6 +4948,7 @@
                   <a:srgbClr val="1B3B6F"/>
                 </a:solidFill>
                 <a:latin typeface="Amiri" pitchFamily="2" charset="-78"/>
+                <a:ea typeface="Amiri" pitchFamily="2" charset="-78"/>
                 <a:cs typeface="Amiri" pitchFamily="2" charset="-78"/>
               </a:rPr>
               <a:t>بيت</a:t>
@@ -5030,6 +5076,7 @@
                   <a:srgbClr val="1F2A37"/>
                 </a:solidFill>
                 <a:latin typeface="Amiri" pitchFamily="2" charset="-78"/>
+                <a:ea typeface="Amiri" pitchFamily="2" charset="-78"/>
                 <a:cs typeface="Amiri" pitchFamily="2" charset="-78"/>
               </a:rPr>
               <a:t>ي</a:t>
@@ -5730,6 +5777,7 @@
                   <a:srgbClr val="1B3B6F"/>
                 </a:solidFill>
                 <a:latin typeface="Amiri" pitchFamily="2" charset="-78"/>
+                <a:ea typeface="Amiri" pitchFamily="2" charset="-78"/>
                 <a:cs typeface="Amiri" pitchFamily="2" charset="-78"/>
               </a:rPr>
               <a:t>ة</a:t>
@@ -5756,6 +5804,7 @@
                   <a:srgbClr val="1B3B6F"/>
                 </a:solidFill>
                 <a:latin typeface="Amiri" pitchFamily="2" charset="-78"/>
+                <a:ea typeface="Amiri" pitchFamily="2" charset="-78"/>
                 <a:cs typeface="Amiri" pitchFamily="2" charset="-78"/>
               </a:rPr>
               <a:t>مدرسة</a:t>
@@ -6205,6 +6254,7 @@
                   <a:srgbClr val="D4AF37"/>
                 </a:solidFill>
                 <a:latin typeface="Amiri" pitchFamily="2" charset="-78"/>
+                <a:ea typeface="Amiri" pitchFamily="2" charset="-78"/>
                 <a:cs typeface="Amiri" pitchFamily="2" charset="-78"/>
               </a:rPr>
               <a:t>م</a:t>
@@ -6525,6 +6575,7 @@
                   <a:srgbClr val="8A6D1E"/>
                 </a:solidFill>
                 <a:latin typeface="Amiri" pitchFamily="2" charset="-78"/>
+                <a:ea typeface="Amiri" pitchFamily="2" charset="-78"/>
                 <a:cs typeface="Amiri" pitchFamily="2" charset="-78"/>
               </a:rPr>
               <a:t>الإِجَابَاتُ وَالتَّعْلِيلُ</a:t>
@@ -7214,6 +7265,7 @@
                   <a:srgbClr val="1B3B6F"/>
                 </a:solidFill>
                 <a:latin typeface="Amiri" pitchFamily="2" charset="-78"/>
+                <a:ea typeface="Amiri" pitchFamily="2" charset="-78"/>
                 <a:cs typeface="Amiri" pitchFamily="2" charset="-78"/>
               </a:rPr>
               <a:t>بت</a:t>
@@ -7240,6 +7292,7 @@
                   <a:srgbClr val="1B3B6F"/>
                 </a:solidFill>
                 <a:latin typeface="Amiri" pitchFamily="2" charset="-78"/>
+                <a:ea typeface="Amiri" pitchFamily="2" charset="-78"/>
                 <a:cs typeface="Amiri" pitchFamily="2" charset="-78"/>
               </a:rPr>
               <a:t>بيت</a:t>
@@ -7394,6 +7447,7 @@
                   <a:srgbClr val="1F2A37"/>
                 </a:solidFill>
                 <a:latin typeface="Amiri" pitchFamily="2" charset="-78"/>
+                <a:ea typeface="Amiri" pitchFamily="2" charset="-78"/>
                 <a:cs typeface="Amiri" pitchFamily="2" charset="-78"/>
               </a:rPr>
               <a:t>ي</a:t>
@@ -8197,6 +8251,7 @@
                   <a:srgbClr val="1B3B6F"/>
                 </a:solidFill>
                 <a:latin typeface="Amiri" pitchFamily="2" charset="-78"/>
+                <a:ea typeface="Amiri" pitchFamily="2" charset="-78"/>
                 <a:cs typeface="Amiri" pitchFamily="2" charset="-78"/>
               </a:rPr>
               <a:t>ة</a:t>
@@ -8223,6 +8278,7 @@
                   <a:srgbClr val="1B3B6F"/>
                 </a:solidFill>
                 <a:latin typeface="Amiri" pitchFamily="2" charset="-78"/>
+                <a:ea typeface="Amiri" pitchFamily="2" charset="-78"/>
                 <a:cs typeface="Amiri" pitchFamily="2" charset="-78"/>
               </a:rPr>
               <a:t>مدرسة</a:t>
@@ -8737,6 +8793,7 @@
                   <a:srgbClr val="D4AF37"/>
                 </a:solidFill>
                 <a:latin typeface="Amiri" pitchFamily="2" charset="-78"/>
+                <a:ea typeface="Amiri" pitchFamily="2" charset="-78"/>
                 <a:cs typeface="Amiri" pitchFamily="2" charset="-78"/>
               </a:rPr>
               <a:t>م</a:t>
@@ -9057,6 +9114,7 @@
                   <a:srgbClr val="8A6D1E"/>
                 </a:solidFill>
                 <a:latin typeface="Amiri" pitchFamily="2" charset="-78"/>
+                <a:ea typeface="Amiri" pitchFamily="2" charset="-78"/>
                 <a:cs typeface="Amiri" pitchFamily="2" charset="-78"/>
               </a:rPr>
               <a:t>سُلَّمُ الحَرَكَاتِ</a:t>
@@ -9375,6 +9433,7 @@
                   <a:srgbClr val="1B3B6F"/>
                 </a:solidFill>
                 <a:latin typeface="Amiri" pitchFamily="2" charset="-78"/>
+                <a:ea typeface="Amiri" pitchFamily="2" charset="-78"/>
                 <a:cs typeface="Amiri" pitchFamily="2" charset="-78"/>
               </a:rPr>
               <a:t>فُنْدُقٌ</a:t>
@@ -9413,6 +9472,7 @@
                   <a:srgbClr val="1B3B6F"/>
                 </a:solidFill>
                 <a:latin typeface="Amiri" pitchFamily="2" charset="-78"/>
+                <a:ea typeface="Amiri" pitchFamily="2" charset="-78"/>
                 <a:cs typeface="Amiri" pitchFamily="2" charset="-78"/>
               </a:rPr>
               <a:t>فُندق</a:t>
@@ -9451,6 +9511,7 @@
                   <a:srgbClr val="1B3B6F"/>
                 </a:solidFill>
                 <a:latin typeface="Amiri" pitchFamily="2" charset="-78"/>
+                <a:ea typeface="Amiri" pitchFamily="2" charset="-78"/>
                 <a:cs typeface="Amiri" pitchFamily="2" charset="-78"/>
               </a:rPr>
               <a:t>فندق</a:t>
@@ -9619,6 +9680,7 @@
                   <a:srgbClr val="1B3B6F"/>
                 </a:solidFill>
                 <a:latin typeface="Amiri" pitchFamily="2" charset="-78"/>
+                <a:ea typeface="Amiri" pitchFamily="2" charset="-78"/>
                 <a:cs typeface="Amiri" pitchFamily="2" charset="-78"/>
               </a:rPr>
               <a:t>مَطْعَمٌ</a:t>
@@ -9657,6 +9719,7 @@
                   <a:srgbClr val="1B3B6F"/>
                 </a:solidFill>
                 <a:latin typeface="Amiri" pitchFamily="2" charset="-78"/>
+                <a:ea typeface="Amiri" pitchFamily="2" charset="-78"/>
                 <a:cs typeface="Amiri" pitchFamily="2" charset="-78"/>
               </a:rPr>
               <a:t>مَطْعم</a:t>
@@ -9695,6 +9758,7 @@
                   <a:srgbClr val="1B3B6F"/>
                 </a:solidFill>
                 <a:latin typeface="Amiri" pitchFamily="2" charset="-78"/>
+                <a:ea typeface="Amiri" pitchFamily="2" charset="-78"/>
                 <a:cs typeface="Amiri" pitchFamily="2" charset="-78"/>
               </a:rPr>
               <a:t>مطعم</a:t>
@@ -9863,6 +9927,7 @@
                   <a:srgbClr val="1B3B6F"/>
                 </a:solidFill>
                 <a:latin typeface="Amiri" pitchFamily="2" charset="-78"/>
+                <a:ea typeface="Amiri" pitchFamily="2" charset="-78"/>
                 <a:cs typeface="Amiri" pitchFamily="2" charset="-78"/>
               </a:rPr>
               <a:t>مَدْرَسَةٌ</a:t>
@@ -9901,6 +9966,7 @@
                   <a:srgbClr val="1B3B6F"/>
                 </a:solidFill>
                 <a:latin typeface="Amiri" pitchFamily="2" charset="-78"/>
+                <a:ea typeface="Amiri" pitchFamily="2" charset="-78"/>
                 <a:cs typeface="Amiri" pitchFamily="2" charset="-78"/>
               </a:rPr>
               <a:t>مَدْرسة</a:t>
@@ -9939,6 +10005,7 @@
                   <a:srgbClr val="1B3B6F"/>
                 </a:solidFill>
                 <a:latin typeface="Amiri" pitchFamily="2" charset="-78"/>
+                <a:ea typeface="Amiri" pitchFamily="2" charset="-78"/>
                 <a:cs typeface="Amiri" pitchFamily="2" charset="-78"/>
               </a:rPr>
               <a:t>مدرسة</a:t>
@@ -10107,6 +10174,7 @@
                   <a:srgbClr val="1B3B6F"/>
                 </a:solidFill>
                 <a:latin typeface="Amiri" pitchFamily="2" charset="-78"/>
+                <a:ea typeface="Amiri" pitchFamily="2" charset="-78"/>
                 <a:cs typeface="Amiri" pitchFamily="2" charset="-78"/>
               </a:rPr>
               <a:t>مَحَطَّةٌ</a:t>
@@ -10145,6 +10213,7 @@
                   <a:srgbClr val="1B3B6F"/>
                 </a:solidFill>
                 <a:latin typeface="Amiri" pitchFamily="2" charset="-78"/>
+                <a:ea typeface="Amiri" pitchFamily="2" charset="-78"/>
                 <a:cs typeface="Amiri" pitchFamily="2" charset="-78"/>
               </a:rPr>
               <a:t>محطَّة</a:t>
@@ -10183,6 +10252,7 @@
                   <a:srgbClr val="1B3B6F"/>
                 </a:solidFill>
                 <a:latin typeface="Amiri" pitchFamily="2" charset="-78"/>
+                <a:ea typeface="Amiri" pitchFamily="2" charset="-78"/>
                 <a:cs typeface="Amiri" pitchFamily="2" charset="-78"/>
               </a:rPr>
               <a:t>محطة</a:t>
@@ -10316,6 +10386,7 @@
                   <a:srgbClr val="D4AF37"/>
                 </a:solidFill>
                 <a:latin typeface="Amiri" pitchFamily="2" charset="-78"/>
+                <a:ea typeface="Amiri" pitchFamily="2" charset="-78"/>
                 <a:cs typeface="Amiri" pitchFamily="2" charset="-78"/>
               </a:rPr>
               <a:t>م</a:t>
@@ -10636,6 +10707,7 @@
                   <a:srgbClr val="8A6D1E"/>
                 </a:solidFill>
                 <a:latin typeface="Amiri" pitchFamily="2" charset="-78"/>
+                <a:ea typeface="Amiri" pitchFamily="2" charset="-78"/>
                 <a:cs typeface="Amiri" pitchFamily="2" charset="-78"/>
               </a:rPr>
               <a:t>اِقْرَأِ اللَّافِتَةَ</a:t>
@@ -11240,6 +11312,7 @@
                   <a:srgbClr val="1B3B6F"/>
                 </a:solidFill>
                 <a:latin typeface="Amiri" pitchFamily="2" charset="-78"/>
+                <a:ea typeface="Amiri" pitchFamily="2" charset="-78"/>
                 <a:cs typeface="Amiri" pitchFamily="2" charset="-78"/>
               </a:rPr>
               <a:t>مستشفى</a:t>
@@ -11368,6 +11441,7 @@
                   <a:srgbClr val="1B3B6F"/>
                 </a:solidFill>
                 <a:latin typeface="Amiri" pitchFamily="2" charset="-78"/>
+                <a:ea typeface="Amiri" pitchFamily="2" charset="-78"/>
                 <a:cs typeface="Amiri" pitchFamily="2" charset="-78"/>
               </a:rPr>
               <a:t>محطة</a:t>
@@ -11496,6 +11570,7 @@
                   <a:srgbClr val="1B3B6F"/>
                 </a:solidFill>
                 <a:latin typeface="Amiri" pitchFamily="2" charset="-78"/>
+                <a:ea typeface="Amiri" pitchFamily="2" charset="-78"/>
                 <a:cs typeface="Amiri" pitchFamily="2" charset="-78"/>
               </a:rPr>
               <a:t>مطعم</a:t>
@@ -11705,6 +11780,7 @@
                   <a:srgbClr val="D4AF37"/>
                 </a:solidFill>
                 <a:latin typeface="Amiri" pitchFamily="2" charset="-78"/>
+                <a:ea typeface="Amiri" pitchFamily="2" charset="-78"/>
                 <a:cs typeface="Amiri" pitchFamily="2" charset="-78"/>
               </a:rPr>
               <a:t>م</a:t>
@@ -12025,6 +12101,7 @@
                   <a:srgbClr val="8A6D1E"/>
                 </a:solidFill>
                 <a:latin typeface="Amiri" pitchFamily="2" charset="-78"/>
+                <a:ea typeface="Amiri" pitchFamily="2" charset="-78"/>
                 <a:cs typeface="Amiri" pitchFamily="2" charset="-78"/>
               </a:rPr>
               <a:t>اِقْرَأِ اللَّافِتَةَ</a:t>
@@ -12344,6 +12421,7 @@
                   <a:srgbClr val="1B3B6F"/>
                 </a:solidFill>
                 <a:latin typeface="Amiri" pitchFamily="2" charset="-78"/>
+                <a:ea typeface="Amiri" pitchFamily="2" charset="-78"/>
                 <a:cs typeface="Amiri" pitchFamily="2" charset="-78"/>
               </a:rPr>
               <a:t>مطعم</a:t>
@@ -12663,6 +12741,7 @@
                   <a:srgbClr val="1B3B6F"/>
                 </a:solidFill>
                 <a:latin typeface="Amiri" pitchFamily="2" charset="-78"/>
+                <a:ea typeface="Amiri" pitchFamily="2" charset="-78"/>
                 <a:cs typeface="Amiri" pitchFamily="2" charset="-78"/>
               </a:rPr>
               <a:t>مستشفى</a:t>
@@ -12982,6 +13061,7 @@
                   <a:srgbClr val="1B3B6F"/>
                 </a:solidFill>
                 <a:latin typeface="Amiri" pitchFamily="2" charset="-78"/>
+                <a:ea typeface="Amiri" pitchFamily="2" charset="-78"/>
                 <a:cs typeface="Amiri" pitchFamily="2" charset="-78"/>
               </a:rPr>
               <a:t>محطة</a:t>
@@ -13153,6 +13233,7 @@
                   <a:srgbClr val="D4AF37"/>
                 </a:solidFill>
                 <a:latin typeface="Amiri" pitchFamily="2" charset="-78"/>
+                <a:ea typeface="Amiri" pitchFamily="2" charset="-78"/>
                 <a:cs typeface="Amiri" pitchFamily="2" charset="-78"/>
               </a:rPr>
               <a:t>م</a:t>
@@ -13473,6 +13554,7 @@
                   <a:srgbClr val="8A6D1E"/>
                 </a:solidFill>
                 <a:latin typeface="Amiri" pitchFamily="2" charset="-78"/>
+                <a:ea typeface="Amiri" pitchFamily="2" charset="-78"/>
                 <a:cs typeface="Amiri" pitchFamily="2" charset="-78"/>
               </a:rPr>
               <a:t>لَافِتَاتٌ مِنَ الحَيَاةِ اليَوْمِيَّةِ</a:t>
@@ -13753,6 +13835,7 @@
                   <a:srgbClr val="1B3B6F"/>
                 </a:solidFill>
                 <a:latin typeface="Amiri" pitchFamily="2" charset="-78"/>
+                <a:ea typeface="Amiri" pitchFamily="2" charset="-78"/>
                 <a:cs typeface="Amiri" pitchFamily="2" charset="-78"/>
               </a:rPr>
               <a:t>مطعم</a:t>
@@ -13791,6 +13874,7 @@
                   <a:srgbClr val="1B3B6F"/>
                 </a:solidFill>
                 <a:latin typeface="Amiri" pitchFamily="2" charset="-78"/>
+                <a:ea typeface="Amiri" pitchFamily="2" charset="-78"/>
                 <a:cs typeface="Amiri" pitchFamily="2" charset="-78"/>
               </a:rPr>
               <a:t>مَطْعَم</a:t>
@@ -13867,6 +13951,7 @@
                   <a:srgbClr val="5A6472"/>
                 </a:solidFill>
                 <a:latin typeface="Amiri" pitchFamily="2" charset="-78"/>
+                <a:ea typeface="Amiri" pitchFamily="2" charset="-78"/>
                 <a:cs typeface="Amiri" pitchFamily="2" charset="-78"/>
               </a:rPr>
               <a:t>ط</a:t>
@@ -13893,6 +13978,7 @@
                   <a:srgbClr val="5A6472"/>
                 </a:solidFill>
                 <a:latin typeface="Amiri" pitchFamily="2" charset="-78"/>
+                <a:ea typeface="Amiri" pitchFamily="2" charset="-78"/>
                 <a:cs typeface="Amiri" pitchFamily="2" charset="-78"/>
               </a:rPr>
               <a:t>ع</a:t>
@@ -14036,6 +14122,7 @@
                   <a:srgbClr val="1B3B6F"/>
                 </a:solidFill>
                 <a:latin typeface="Amiri" pitchFamily="2" charset="-78"/>
+                <a:ea typeface="Amiri" pitchFamily="2" charset="-78"/>
                 <a:cs typeface="Amiri" pitchFamily="2" charset="-78"/>
               </a:rPr>
               <a:t>مدرسة</a:t>
@@ -14074,6 +14161,7 @@
                   <a:srgbClr val="1B3B6F"/>
                 </a:solidFill>
                 <a:latin typeface="Amiri" pitchFamily="2" charset="-78"/>
+                <a:ea typeface="Amiri" pitchFamily="2" charset="-78"/>
                 <a:cs typeface="Amiri" pitchFamily="2" charset="-78"/>
               </a:rPr>
               <a:t>مَدْرَسَة</a:t>
@@ -14163,6 +14251,7 @@
                   <a:srgbClr val="5A6472"/>
                 </a:solidFill>
                 <a:latin typeface="Amiri" pitchFamily="2" charset="-78"/>
+                <a:ea typeface="Amiri" pitchFamily="2" charset="-78"/>
                 <a:cs typeface="Amiri" pitchFamily="2" charset="-78"/>
               </a:rPr>
               <a:t>ة</a:t>
@@ -14293,6 +14382,7 @@
                   <a:srgbClr val="1B3B6F"/>
                 </a:solidFill>
                 <a:latin typeface="Amiri" pitchFamily="2" charset="-78"/>
+                <a:ea typeface="Amiri" pitchFamily="2" charset="-78"/>
                 <a:cs typeface="Amiri" pitchFamily="2" charset="-78"/>
               </a:rPr>
               <a:t>مستشفى</a:t>
@@ -14331,6 +14421,7 @@
                   <a:srgbClr val="1B3B6F"/>
                 </a:solidFill>
                 <a:latin typeface="Amiri" pitchFamily="2" charset="-78"/>
+                <a:ea typeface="Amiri" pitchFamily="2" charset="-78"/>
                 <a:cs typeface="Amiri" pitchFamily="2" charset="-78"/>
               </a:rPr>
               <a:t>مُسْتَشْفَى</a:t>
@@ -14420,6 +14511,7 @@
                   <a:srgbClr val="5A6472"/>
                 </a:solidFill>
                 <a:latin typeface="Amiri" pitchFamily="2" charset="-78"/>
+                <a:ea typeface="Amiri" pitchFamily="2" charset="-78"/>
                 <a:cs typeface="Amiri" pitchFamily="2" charset="-78"/>
               </a:rPr>
               <a:t>ى</a:t>
@@ -14563,6 +14655,7 @@
                   <a:srgbClr val="1B3B6F"/>
                 </a:solidFill>
                 <a:latin typeface="Amiri" pitchFamily="2" charset="-78"/>
+                <a:ea typeface="Amiri" pitchFamily="2" charset="-78"/>
                 <a:cs typeface="Amiri" pitchFamily="2" charset="-78"/>
               </a:rPr>
               <a:t>مسجد</a:t>
@@ -14601,6 +14694,7 @@
                   <a:srgbClr val="1B3B6F"/>
                 </a:solidFill>
                 <a:latin typeface="Amiri" pitchFamily="2" charset="-78"/>
+                <a:ea typeface="Amiri" pitchFamily="2" charset="-78"/>
                 <a:cs typeface="Amiri" pitchFamily="2" charset="-78"/>
               </a:rPr>
               <a:t>مَسْجِد</a:t>
@@ -14690,6 +14784,7 @@
                   <a:srgbClr val="5A6472"/>
                 </a:solidFill>
                 <a:latin typeface="Amiri" pitchFamily="2" charset="-78"/>
+                <a:ea typeface="Amiri" pitchFamily="2" charset="-78"/>
                 <a:cs typeface="Amiri" pitchFamily="2" charset="-78"/>
               </a:rPr>
               <a:t>د</a:t>
@@ -14820,6 +14915,7 @@
                   <a:srgbClr val="1B3B6F"/>
                 </a:solidFill>
                 <a:latin typeface="Amiri" pitchFamily="2" charset="-78"/>
+                <a:ea typeface="Amiri" pitchFamily="2" charset="-78"/>
                 <a:cs typeface="Amiri" pitchFamily="2" charset="-78"/>
               </a:rPr>
               <a:t>محطة</a:t>
@@ -14858,6 +14954,7 @@
                   <a:srgbClr val="1B3B6F"/>
                 </a:solidFill>
                 <a:latin typeface="Amiri" pitchFamily="2" charset="-78"/>
+                <a:ea typeface="Amiri" pitchFamily="2" charset="-78"/>
                 <a:cs typeface="Amiri" pitchFamily="2" charset="-78"/>
               </a:rPr>
               <a:t>مَحَطَّة</a:t>
@@ -14947,6 +15044,7 @@
                   <a:srgbClr val="5A6472"/>
                 </a:solidFill>
                 <a:latin typeface="Amiri" pitchFamily="2" charset="-78"/>
+                <a:ea typeface="Amiri" pitchFamily="2" charset="-78"/>
                 <a:cs typeface="Amiri" pitchFamily="2" charset="-78"/>
               </a:rPr>
               <a:t>ة</a:t>
@@ -15025,6 +15123,7 @@
                   <a:srgbClr val="1B3B6F"/>
                 </a:solidFill>
                 <a:latin typeface="Amiri" pitchFamily="2" charset="-78"/>
+                <a:ea typeface="Amiri" pitchFamily="2" charset="-78"/>
                 <a:cs typeface="Amiri" pitchFamily="2" charset="-78"/>
               </a:rPr>
               <a:t>شارع</a:t>
@@ -15063,6 +15162,7 @@
                   <a:srgbClr val="1B3B6F"/>
                 </a:solidFill>
                 <a:latin typeface="Amiri" pitchFamily="2" charset="-78"/>
+                <a:ea typeface="Amiri" pitchFamily="2" charset="-78"/>
                 <a:cs typeface="Amiri" pitchFamily="2" charset="-78"/>
               </a:rPr>
               <a:t>شَارِع</a:t>
@@ -15204,6 +15304,7 @@
                   <a:srgbClr val="1B3B6F"/>
                 </a:solidFill>
                 <a:latin typeface="Amiri" pitchFamily="2" charset="-78"/>
+                <a:ea typeface="Amiri" pitchFamily="2" charset="-78"/>
                 <a:cs typeface="Amiri" pitchFamily="2" charset="-78"/>
               </a:rPr>
               <a:t>بنك</a:t>
@@ -15242,6 +15343,7 @@
                   <a:srgbClr val="1B3B6F"/>
                 </a:solidFill>
                 <a:latin typeface="Amiri" pitchFamily="2" charset="-78"/>
+                <a:ea typeface="Amiri" pitchFamily="2" charset="-78"/>
                 <a:cs typeface="Amiri" pitchFamily="2" charset="-78"/>
               </a:rPr>
               <a:t>بَنْك</a:t>
@@ -15331,6 +15433,7 @@
                   <a:srgbClr val="5A6472"/>
                 </a:solidFill>
                 <a:latin typeface="Amiri" pitchFamily="2" charset="-78"/>
+                <a:ea typeface="Amiri" pitchFamily="2" charset="-78"/>
                 <a:cs typeface="Amiri" pitchFamily="2" charset="-78"/>
               </a:rPr>
               <a:t>ب ن</a:t>
@@ -15396,6 +15499,7 @@
                   <a:srgbClr val="1B3B6F"/>
                 </a:solidFill>
                 <a:latin typeface="Amiri" pitchFamily="2" charset="-78"/>
+                <a:ea typeface="Amiri" pitchFamily="2" charset="-78"/>
                 <a:cs typeface="Amiri" pitchFamily="2" charset="-78"/>
               </a:rPr>
               <a:t>فندق</a:t>
@@ -15434,6 +15538,7 @@
                   <a:srgbClr val="1B3B6F"/>
                 </a:solidFill>
                 <a:latin typeface="Amiri" pitchFamily="2" charset="-78"/>
+                <a:ea typeface="Amiri" pitchFamily="2" charset="-78"/>
                 <a:cs typeface="Amiri" pitchFamily="2" charset="-78"/>
               </a:rPr>
               <a:t>فُنْدُق</a:t>
@@ -15510,6 +15615,7 @@
                   <a:srgbClr val="5A6472"/>
                 </a:solidFill>
                 <a:latin typeface="Amiri" pitchFamily="2" charset="-78"/>
+                <a:ea typeface="Amiri" pitchFamily="2" charset="-78"/>
                 <a:cs typeface="Amiri" pitchFamily="2" charset="-78"/>
               </a:rPr>
               <a:t>ف</a:t>
@@ -15536,6 +15642,7 @@
                   <a:srgbClr val="5A6472"/>
                 </a:solidFill>
                 <a:latin typeface="Amiri" pitchFamily="2" charset="-78"/>
+                <a:ea typeface="Amiri" pitchFamily="2" charset="-78"/>
                 <a:cs typeface="Amiri" pitchFamily="2" charset="-78"/>
               </a:rPr>
               <a:t>ق</a:t>
@@ -15682,6 +15789,7 @@
                   <a:srgbClr val="D4AF37"/>
                 </a:solidFill>
                 <a:latin typeface="Amiri" pitchFamily="2" charset="-78"/>
+                <a:ea typeface="Amiri" pitchFamily="2" charset="-78"/>
                 <a:cs typeface="Amiri" pitchFamily="2" charset="-78"/>
               </a:rPr>
               <a:t>م</a:t>
@@ -16002,6 +16110,7 @@
                   <a:srgbClr val="8A6D1E"/>
                 </a:solidFill>
                 <a:latin typeface="Amiri" pitchFamily="2" charset="-78"/>
+                <a:ea typeface="Amiri" pitchFamily="2" charset="-78"/>
                 <a:cs typeface="Amiri" pitchFamily="2" charset="-78"/>
               </a:rPr>
               <a:t>هَيْكَلٌ وَاحِدٌ، قِرَاءَاتٌ مُخْتَلِفَةٌ</a:t>
@@ -16213,6 +16322,7 @@
                   <a:srgbClr val="1F2A37"/>
                 </a:solidFill>
                 <a:latin typeface="Amiri" pitchFamily="2" charset="-78"/>
+                <a:ea typeface="Amiri" pitchFamily="2" charset="-78"/>
                 <a:cs typeface="Amiri" pitchFamily="2" charset="-78"/>
               </a:rPr>
               <a:t>في الحقيبة ثلاثة كتب.</a:t>
@@ -16588,6 +16698,7 @@
                   <a:srgbClr val="1F2A37"/>
                 </a:solidFill>
                 <a:latin typeface="Amiri" pitchFamily="2" charset="-78"/>
+                <a:ea typeface="Amiri" pitchFamily="2" charset="-78"/>
                 <a:cs typeface="Amiri" pitchFamily="2" charset="-78"/>
               </a:rPr>
               <a:t>كتب أحمد درسا.</a:t>
@@ -16963,6 +17074,7 @@
                   <a:srgbClr val="1F2A37"/>
                 </a:solidFill>
                 <a:latin typeface="Amiri" pitchFamily="2" charset="-78"/>
+                <a:ea typeface="Amiri" pitchFamily="2" charset="-78"/>
                 <a:cs typeface="Amiri" pitchFamily="2" charset="-78"/>
               </a:rPr>
               <a:t>رفع الطالب العلم.</a:t>
@@ -17338,6 +17450,7 @@
                   <a:srgbClr val="1F2A37"/>
                 </a:solidFill>
                 <a:latin typeface="Amiri" pitchFamily="2" charset="-78"/>
+                <a:ea typeface="Amiri" pitchFamily="2" charset="-78"/>
                 <a:cs typeface="Amiri" pitchFamily="2" charset="-78"/>
               </a:rPr>
               <a:t>دخل المعلم الفصل.</a:t>
@@ -17688,6 +17801,7 @@
                   <a:srgbClr val="1B3B6F"/>
                 </a:solidFill>
                 <a:latin typeface="Amiri" pitchFamily="2" charset="-78"/>
+                <a:ea typeface="Amiri" pitchFamily="2" charset="-78"/>
                 <a:cs typeface="Amiri" pitchFamily="2" charset="-78"/>
               </a:rPr>
               <a:t>بت</a:t>
@@ -17714,6 +17828,7 @@
                   <a:srgbClr val="1B3B6F"/>
                 </a:solidFill>
                 <a:latin typeface="Amiri" pitchFamily="2" charset="-78"/>
+                <a:ea typeface="Amiri" pitchFamily="2" charset="-78"/>
                 <a:cs typeface="Amiri" pitchFamily="2" charset="-78"/>
               </a:rPr>
               <a:t>بيت</a:t>
@@ -18231,6 +18346,7 @@
                   <a:srgbClr val="D4AF37"/>
                 </a:solidFill>
                 <a:latin typeface="Amiri" pitchFamily="2" charset="-78"/>
+                <a:ea typeface="Amiri" pitchFamily="2" charset="-78"/>
                 <a:cs typeface="Amiri" pitchFamily="2" charset="-78"/>
               </a:rPr>
               <a:t>م</a:t>
@@ -18551,6 +18667,7 @@
                   <a:srgbClr val="8A6D1E"/>
                 </a:solidFill>
                 <a:latin typeface="Amiri" pitchFamily="2" charset="-78"/>
+                <a:ea typeface="Amiri" pitchFamily="2" charset="-78"/>
                 <a:cs typeface="Amiri" pitchFamily="2" charset="-78"/>
               </a:rPr>
               <a:t>الإِجَابَاتُ</a:t>
@@ -18762,6 +18879,7 @@
                   <a:srgbClr val="1F2A37"/>
                 </a:solidFill>
                 <a:latin typeface="Amiri" pitchFamily="2" charset="-78"/>
+                <a:ea typeface="Amiri" pitchFamily="2" charset="-78"/>
                 <a:cs typeface="Amiri" pitchFamily="2" charset="-78"/>
               </a:rPr>
               <a:t>في الحقيبة ثلاثة كتب.</a:t>
@@ -19042,6 +19160,7 @@
                   <a:srgbClr val="8A6D1E"/>
                 </a:solidFill>
                 <a:latin typeface="Amiri" pitchFamily="2" charset="-78"/>
+                <a:ea typeface="Amiri" pitchFamily="2" charset="-78"/>
                 <a:cs typeface="Amiri" pitchFamily="2" charset="-78"/>
               </a:rPr>
               <a:t>كُتُب</a:t>
@@ -19228,6 +19347,7 @@
                   <a:srgbClr val="1F2A37"/>
                 </a:solidFill>
                 <a:latin typeface="Amiri" pitchFamily="2" charset="-78"/>
+                <a:ea typeface="Amiri" pitchFamily="2" charset="-78"/>
                 <a:cs typeface="Amiri" pitchFamily="2" charset="-78"/>
               </a:rPr>
               <a:t>كتب أحمد درسا.</a:t>
@@ -19508,6 +19628,7 @@
                   <a:srgbClr val="8A6D1E"/>
                 </a:solidFill>
                 <a:latin typeface="Amiri" pitchFamily="2" charset="-78"/>
+                <a:ea typeface="Amiri" pitchFamily="2" charset="-78"/>
                 <a:cs typeface="Amiri" pitchFamily="2" charset="-78"/>
               </a:rPr>
               <a:t>كَتَبَ</a:t>
@@ -19694,6 +19815,7 @@
                   <a:srgbClr val="1F2A37"/>
                 </a:solidFill>
                 <a:latin typeface="Amiri" pitchFamily="2" charset="-78"/>
+                <a:ea typeface="Amiri" pitchFamily="2" charset="-78"/>
                 <a:cs typeface="Amiri" pitchFamily="2" charset="-78"/>
               </a:rPr>
               <a:t>رفع الطالب العلم.</a:t>
@@ -19974,6 +20096,7 @@
                   <a:srgbClr val="8A6D1E"/>
                 </a:solidFill>
                 <a:latin typeface="Amiri" pitchFamily="2" charset="-78"/>
+                <a:ea typeface="Amiri" pitchFamily="2" charset="-78"/>
                 <a:cs typeface="Amiri" pitchFamily="2" charset="-78"/>
               </a:rPr>
               <a:t>العَلَم</a:t>
@@ -20160,6 +20283,7 @@
                   <a:srgbClr val="1F2A37"/>
                 </a:solidFill>
                 <a:latin typeface="Amiri" pitchFamily="2" charset="-78"/>
+                <a:ea typeface="Amiri" pitchFamily="2" charset="-78"/>
                 <a:cs typeface="Amiri" pitchFamily="2" charset="-78"/>
               </a:rPr>
               <a:t>دخل المعلم الفصل.</a:t>
@@ -20440,6 +20564,7 @@
                   <a:srgbClr val="8A6D1E"/>
                 </a:solidFill>
                 <a:latin typeface="Amiri" pitchFamily="2" charset="-78"/>
+                <a:ea typeface="Amiri" pitchFamily="2" charset="-78"/>
                 <a:cs typeface="Amiri" pitchFamily="2" charset="-78"/>
               </a:rPr>
               <a:t>دَخَلَ</a:t>
@@ -20601,6 +20726,7 @@
                   <a:srgbClr val="1B3B6F"/>
                 </a:solidFill>
                 <a:latin typeface="Amiri" pitchFamily="2" charset="-78"/>
+                <a:ea typeface="Amiri" pitchFamily="2" charset="-78"/>
                 <a:cs typeface="Amiri" pitchFamily="2" charset="-78"/>
               </a:rPr>
               <a:t>بت</a:t>
@@ -20627,6 +20753,7 @@
                   <a:srgbClr val="1B3B6F"/>
                 </a:solidFill>
                 <a:latin typeface="Amiri" pitchFamily="2" charset="-78"/>
+                <a:ea typeface="Amiri" pitchFamily="2" charset="-78"/>
                 <a:cs typeface="Amiri" pitchFamily="2" charset="-78"/>
               </a:rPr>
               <a:t>بيت</a:t>
@@ -20920,6 +21047,7 @@
                   <a:srgbClr val="8A6D1E"/>
                 </a:solidFill>
                 <a:latin typeface="Amiri" pitchFamily="2" charset="-78"/>
+                <a:ea typeface="Amiri" pitchFamily="2" charset="-78"/>
                 <a:cs typeface="Amiri" pitchFamily="2" charset="-78"/>
               </a:rPr>
               <a:t>ي</a:t>
@@ -21235,6 +21363,7 @@
                   <a:srgbClr val="D4AF37"/>
                 </a:solidFill>
                 <a:latin typeface="Amiri" pitchFamily="2" charset="-78"/>
+                <a:ea typeface="Amiri" pitchFamily="2" charset="-78"/>
                 <a:cs typeface="Amiri" pitchFamily="2" charset="-78"/>
               </a:rPr>
               <a:t>م</a:t>
@@ -21555,6 +21684,7 @@
                   <a:srgbClr val="8A6D1E"/>
                 </a:solidFill>
                 <a:latin typeface="Amiri" pitchFamily="2" charset="-78"/>
+                <a:ea typeface="Amiri" pitchFamily="2" charset="-78"/>
                 <a:cs typeface="Amiri" pitchFamily="2" charset="-78"/>
               </a:rPr>
               <a:t>اِفْهَمِ النَّصَّ مِنَ السِّيَاقِ</a:t>
@@ -21658,6 +21788,7 @@
                   <a:srgbClr val="1B3B6F"/>
                 </a:solidFill>
                 <a:latin typeface="Amiri" pitchFamily="2" charset="-78"/>
+                <a:ea typeface="Amiri" pitchFamily="2" charset="-78"/>
                 <a:cs typeface="Amiri" pitchFamily="2" charset="-78"/>
               </a:rPr>
               <a:t>هذه مدرسة كبيرة.</a:t>
@@ -21761,6 +21892,7 @@
                   <a:srgbClr val="1B3B6F"/>
                 </a:solidFill>
                 <a:latin typeface="Amiri" pitchFamily="2" charset="-78"/>
+                <a:ea typeface="Amiri" pitchFamily="2" charset="-78"/>
                 <a:cs typeface="Amiri" pitchFamily="2" charset="-78"/>
               </a:rPr>
               <a:t>في المدرسة فصل ومكتبة.</a:t>
@@ -21864,6 +21996,7 @@
                   <a:srgbClr val="1B3B6F"/>
                 </a:solidFill>
                 <a:latin typeface="Amiri" pitchFamily="2" charset="-78"/>
+                <a:ea typeface="Amiri" pitchFamily="2" charset="-78"/>
                 <a:cs typeface="Amiri" pitchFamily="2" charset="-78"/>
               </a:rPr>
               <a:t>يقرأ الطلاب كتبا في المكتبة.</a:t>
@@ -22035,6 +22168,7 @@
                   <a:srgbClr val="D4AF37"/>
                 </a:solidFill>
                 <a:latin typeface="Amiri" pitchFamily="2" charset="-78"/>
+                <a:ea typeface="Amiri" pitchFamily="2" charset="-78"/>
                 <a:cs typeface="Amiri" pitchFamily="2" charset="-78"/>
               </a:rPr>
               <a:t>م</a:t>
@@ -22355,6 +22489,7 @@
                   <a:srgbClr val="8A6D1E"/>
                 </a:solidFill>
                 <a:latin typeface="Amiri" pitchFamily="2" charset="-78"/>
+                <a:ea typeface="Amiri" pitchFamily="2" charset="-78"/>
                 <a:cs typeface="Amiri" pitchFamily="2" charset="-78"/>
               </a:rPr>
               <a:t>اُكْتُبْ</a:t>
@@ -22530,6 +22665,7 @@
                   <a:srgbClr val="2E8B57"/>
                 </a:solidFill>
                 <a:latin typeface="Amiri" pitchFamily="2" charset="-78"/>
+                <a:ea typeface="Amiri" pitchFamily="2" charset="-78"/>
                 <a:cs typeface="Amiri" pitchFamily="2" charset="-78"/>
               </a:rPr>
               <a:t>الأَسَاسُ</a:t>
@@ -22682,11 +22818,12 @@
               <a:buNone/>
             </a:pPr>
             <a:r>
-              <a:rPr lang="en-US" sz="1150" dirty="0">
+              <a:rPr lang="ar-SA" sz="1150" dirty="0">
                 <a:solidFill>
                   <a:srgbClr val="1F2A37"/>
                 </a:solidFill>
                 <a:latin typeface="Calibri" pitchFamily="34" charset="0"/>
+                <a:ea typeface="Amiri" pitchFamily="2" charset="-78"/>
                 <a:cs typeface="Amiri" pitchFamily="2" charset="-78"/>
               </a:rPr>
               <a:t>Use the sign table: e.g. مدرسة — final ة.</a:t>
@@ -22824,6 +22961,7 @@
                   <a:srgbClr val="C9780A"/>
                 </a:solidFill>
                 <a:latin typeface="Amiri" pitchFamily="2" charset="-78"/>
+                <a:ea typeface="Amiri" pitchFamily="2" charset="-78"/>
                 <a:cs typeface="Amiri" pitchFamily="2" charset="-78"/>
               </a:rPr>
               <a:t>التَّطْوِيرُ</a:t>
@@ -22913,6 +23051,7 @@
                   <a:srgbClr val="1F2A37"/>
                 </a:solidFill>
                 <a:latin typeface="Amiri" pitchFamily="2" charset="-78"/>
+                <a:ea typeface="Amiri" pitchFamily="2" charset="-78"/>
                 <a:cs typeface="Amiri" pitchFamily="2" charset="-78"/>
               </a:rPr>
               <a:t>مستشفى</a:t>
@@ -22939,6 +23078,7 @@
                   <a:srgbClr val="1F2A37"/>
                 </a:solidFill>
                 <a:latin typeface="Amiri" pitchFamily="2" charset="-78"/>
+                <a:ea typeface="Amiri" pitchFamily="2" charset="-78"/>
                 <a:cs typeface="Amiri" pitchFamily="2" charset="-78"/>
               </a:rPr>
               <a:t>محطة</a:t>
@@ -23170,6 +23310,7 @@
                   <a:srgbClr val="B83227"/>
                 </a:solidFill>
                 <a:latin typeface="Amiri" pitchFamily="2" charset="-78"/>
+                <a:ea typeface="Amiri" pitchFamily="2" charset="-78"/>
                 <a:cs typeface="Amiri" pitchFamily="2" charset="-78"/>
               </a:rPr>
               <a:t>التَّحَدِّي</a:t>
@@ -23460,6 +23601,7 @@
                   <a:srgbClr val="D4AF37"/>
                 </a:solidFill>
                 <a:latin typeface="Amiri" pitchFamily="2" charset="-78"/>
+                <a:ea typeface="Amiri" pitchFamily="2" charset="-78"/>
                 <a:cs typeface="Amiri" pitchFamily="2" charset="-78"/>
               </a:rPr>
               <a:t>م</a:t>
@@ -23780,6 +23922,7 @@
                   <a:srgbClr val="8A6D1E"/>
                 </a:solidFill>
                 <a:latin typeface="Amiri" pitchFamily="2" charset="-78"/>
+                <a:ea typeface="Amiri" pitchFamily="2" charset="-78"/>
                 <a:cs typeface="Amiri" pitchFamily="2" charset="-78"/>
               </a:rPr>
               <a:t>آدَابُ الصَّفِّ</a:t>
@@ -25311,6 +25454,7 @@
                   <a:srgbClr val="D4AF37"/>
                 </a:solidFill>
                 <a:latin typeface="Amiri" pitchFamily="2" charset="-78"/>
+                <a:ea typeface="Amiri" pitchFamily="2" charset="-78"/>
                 <a:cs typeface="Amiri" pitchFamily="2" charset="-78"/>
               </a:rPr>
               <a:t>م</a:t>
@@ -25631,6 +25775,7 @@
                   <a:srgbClr val="8A6D1E"/>
                 </a:solidFill>
                 <a:latin typeface="Amiri" pitchFamily="2" charset="-78"/>
+                <a:ea typeface="Amiri" pitchFamily="2" charset="-78"/>
                 <a:cs typeface="Amiri" pitchFamily="2" charset="-78"/>
               </a:rPr>
               <a:t>التَّحَدُّثُ</a:t>
@@ -26401,6 +26546,7 @@
                   <a:srgbClr val="1B3B6F"/>
                 </a:solidFill>
                 <a:latin typeface="Amiri" pitchFamily="2" charset="-78"/>
+                <a:ea typeface="Amiri" pitchFamily="2" charset="-78"/>
                 <a:cs typeface="Amiri" pitchFamily="2" charset="-78"/>
               </a:rPr>
               <a:t>اِقْرَأْ: مدرسة</a:t>
@@ -26538,6 +26684,7 @@
                   <a:srgbClr val="1B3B6F"/>
                 </a:solidFill>
                 <a:latin typeface="Amiri" pitchFamily="2" charset="-78"/>
+                <a:ea typeface="Amiri" pitchFamily="2" charset="-78"/>
                 <a:cs typeface="Amiri" pitchFamily="2" charset="-78"/>
               </a:rPr>
               <a:t>مَا مَعْنَى «مطعم»؟</a:t>
@@ -26675,6 +26822,7 @@
                   <a:srgbClr val="1B3B6F"/>
                 </a:solidFill>
                 <a:latin typeface="Amiri" pitchFamily="2" charset="-78"/>
+                <a:ea typeface="Amiri" pitchFamily="2" charset="-78"/>
                 <a:cs typeface="Amiri" pitchFamily="2" charset="-78"/>
               </a:rPr>
               <a:t>اِقْرَأْ: محطة</a:t>
@@ -26812,6 +26960,7 @@
                   <a:srgbClr val="1B3B6F"/>
                 </a:solidFill>
                 <a:latin typeface="Amiri" pitchFamily="2" charset="-78"/>
+                <a:ea typeface="Amiri" pitchFamily="2" charset="-78"/>
                 <a:cs typeface="Amiri" pitchFamily="2" charset="-78"/>
               </a:rPr>
               <a:t>اِقْرَأْ: مستشفى</a:t>
@@ -26987,6 +27136,7 @@
                   <a:srgbClr val="1D5FBF"/>
                 </a:solidFill>
                 <a:latin typeface="Amiri" pitchFamily="2" charset="-78"/>
+                <a:ea typeface="Amiri" pitchFamily="2" charset="-78"/>
                 <a:cs typeface="Amiri" pitchFamily="2" charset="-78"/>
               </a:rPr>
               <a:t>هٰذِهِ ___ .</a:t>
@@ -27090,6 +27240,7 @@
                   <a:srgbClr val="1F2A37"/>
                 </a:solidFill>
                 <a:latin typeface="Amiri" pitchFamily="2" charset="-78"/>
+                <a:ea typeface="Amiri" pitchFamily="2" charset="-78"/>
                 <a:cs typeface="Amiri" pitchFamily="2" charset="-78"/>
               </a:rPr>
               <a:t>فِي آخِرِهَا ___ .</a:t>
@@ -27193,6 +27344,7 @@
                   <a:srgbClr val="1F2A37"/>
                 </a:solidFill>
                 <a:latin typeface="Amiri" pitchFamily="2" charset="-78"/>
+                <a:ea typeface="Amiri" pitchFamily="2" charset="-78"/>
                 <a:cs typeface="Amiri" pitchFamily="2" charset="-78"/>
               </a:rPr>
               <a:t>لَسْتُ مُتَأَكِّدًا لِأَنَّ ___ .</a:t>
@@ -27296,6 +27448,7 @@
                   <a:srgbClr val="1F2A37"/>
                 </a:solidFill>
                 <a:latin typeface="Amiri" pitchFamily="2" charset="-78"/>
+                <a:ea typeface="Amiri" pitchFamily="2" charset="-78"/>
                 <a:cs typeface="Amiri" pitchFamily="2" charset="-78"/>
               </a:rPr>
               <a:t>قَرَأَ / قَرَأَتْ ___ .</a:t>
@@ -27469,6 +27622,7 @@
                   <a:srgbClr val="1F2A37"/>
                 </a:solidFill>
                 <a:latin typeface="Amiri" pitchFamily="2" charset="-78"/>
+                <a:ea typeface="Amiri" pitchFamily="2" charset="-78"/>
                 <a:cs typeface="Amiri" pitchFamily="2" charset="-78"/>
               </a:rPr>
               <a:t>مَا هٰذِهِ اللَّافِتَةُ؟</a:t>
@@ -27520,6 +27674,7 @@
                   <a:srgbClr val="5A6472"/>
                 </a:solidFill>
                 <a:latin typeface="Amiri" pitchFamily="2" charset="-78"/>
+                <a:ea typeface="Amiri" pitchFamily="2" charset="-78"/>
                 <a:cs typeface="Amiri" pitchFamily="2" charset="-78"/>
               </a:rPr>
               <a:t>مدرسة</a:t>
@@ -27634,6 +27789,7 @@
                   <a:srgbClr val="1F2A37"/>
                 </a:solidFill>
                 <a:latin typeface="Amiri" pitchFamily="2" charset="-78"/>
+                <a:ea typeface="Amiri" pitchFamily="2" charset="-78"/>
                 <a:cs typeface="Amiri" pitchFamily="2" charset="-78"/>
               </a:rPr>
               <a:t>هٰذِهِ مَدْرَسَةٌ. فِي آخِرِهَا تَاءٌ مَرْبُوطَةٌ.</a:t>
@@ -27805,6 +27961,7 @@
                   <a:srgbClr val="D4AF37"/>
                 </a:solidFill>
                 <a:latin typeface="Amiri" pitchFamily="2" charset="-78"/>
+                <a:ea typeface="Amiri" pitchFamily="2" charset="-78"/>
                 <a:cs typeface="Amiri" pitchFamily="2" charset="-78"/>
               </a:rPr>
               <a:t>م</a:t>
@@ -28125,6 +28282,7 @@
                   <a:srgbClr val="8A6D1E"/>
                 </a:solidFill>
                 <a:latin typeface="Amiri" pitchFamily="2" charset="-78"/>
+                <a:ea typeface="Amiri" pitchFamily="2" charset="-78"/>
                 <a:cs typeface="Amiri" pitchFamily="2" charset="-78"/>
               </a:rPr>
               <a:t>الدَّلِيلُ قَبْلَ التَّخْمِينِ</a:t>
@@ -29259,6 +29417,7 @@
                   <a:srgbClr val="D4AF37"/>
                 </a:solidFill>
                 <a:latin typeface="Amiri" pitchFamily="2" charset="-78"/>
+                <a:ea typeface="Amiri" pitchFamily="2" charset="-78"/>
                 <a:cs typeface="Amiri" pitchFamily="2" charset="-78"/>
               </a:rPr>
               <a:t>م</a:t>
@@ -29579,6 +29738,7 @@
                   <a:srgbClr val="8A6D1E"/>
                 </a:solidFill>
                 <a:latin typeface="Amiri" pitchFamily="2" charset="-78"/>
+                <a:ea typeface="Amiri" pitchFamily="2" charset="-78"/>
                 <a:cs typeface="Amiri" pitchFamily="2" charset="-78"/>
               </a:rPr>
               <a:t>قَيِّمْ عَمَلَكَ</a:t>
@@ -30736,6 +30896,7 @@
                   <a:srgbClr val="D4AF37"/>
                 </a:solidFill>
                 <a:latin typeface="Amiri" pitchFamily="2" charset="-78"/>
+                <a:ea typeface="Amiri" pitchFamily="2" charset="-78"/>
                 <a:cs typeface="Amiri" pitchFamily="2" charset="-78"/>
               </a:rPr>
               <a:t>م</a:t>
@@ -31056,6 +31217,7 @@
                   <a:srgbClr val="8A6D1E"/>
                 </a:solidFill>
                 <a:latin typeface="Amiri" pitchFamily="2" charset="-78"/>
+                <a:ea typeface="Amiri" pitchFamily="2" charset="-78"/>
                 <a:cs typeface="Amiri" pitchFamily="2" charset="-78"/>
               </a:rPr>
               <a:t>تَذْكِرَةُ الخُرُوجِ</a:t>
@@ -31330,6 +31492,7 @@
                   <a:srgbClr val="1F2A37"/>
                 </a:solidFill>
                 <a:latin typeface="Amiri" pitchFamily="2" charset="-78"/>
+                <a:ea typeface="Amiri" pitchFamily="2" charset="-78"/>
                 <a:cs typeface="Amiri" pitchFamily="2" charset="-78"/>
               </a:rPr>
               <a:t>مستشفى</a:t>
@@ -31431,6 +31594,7 @@
                   <a:srgbClr val="1F2A37"/>
                 </a:solidFill>
                 <a:latin typeface="Amiri" pitchFamily="2" charset="-78"/>
+                <a:ea typeface="Amiri" pitchFamily="2" charset="-78"/>
                 <a:cs typeface="Amiri" pitchFamily="2" charset="-78"/>
               </a:rPr>
               <a:t>مسجد</a:t>
@@ -31532,6 +31696,7 @@
                   <a:srgbClr val="1F2A37"/>
                 </a:solidFill>
                 <a:latin typeface="Amiri" pitchFamily="2" charset="-78"/>
+                <a:ea typeface="Amiri" pitchFamily="2" charset="-78"/>
                 <a:cs typeface="Amiri" pitchFamily="2" charset="-78"/>
               </a:rPr>
               <a:t>مطعم</a:t>
@@ -32550,6 +32715,7 @@
                   <a:srgbClr val="D4AF37"/>
                 </a:solidFill>
                 <a:latin typeface="Amiri" pitchFamily="2" charset="-78"/>
+                <a:ea typeface="Amiri" pitchFamily="2" charset="-78"/>
                 <a:cs typeface="Amiri" pitchFamily="2" charset="-78"/>
               </a:rPr>
               <a:t>م</a:t>
@@ -32870,6 +33036,7 @@
                   <a:srgbClr val="8A6D1E"/>
                 </a:solidFill>
                 <a:latin typeface="Amiri" pitchFamily="2" charset="-78"/>
+                <a:ea typeface="Amiri" pitchFamily="2" charset="-78"/>
                 <a:cs typeface="Amiri" pitchFamily="2" charset="-78"/>
               </a:rPr>
               <a:t>إِجَابَاتُ تَذْكِرَةِ الخُرُوجِ</a:t>
@@ -33171,6 +33338,7 @@
                   <a:srgbClr val="1F2A37"/>
                 </a:solidFill>
                 <a:latin typeface="Amiri" pitchFamily="2" charset="-78"/>
+                <a:ea typeface="Amiri" pitchFamily="2" charset="-78"/>
                 <a:cs typeface="Amiri" pitchFamily="2" charset="-78"/>
               </a:rPr>
               <a:t>مستشفى</a:t>
@@ -33272,6 +33440,7 @@
                   <a:srgbClr val="9AA1AB"/>
                 </a:solidFill>
                 <a:latin typeface="Amiri" pitchFamily="2" charset="-78"/>
+                <a:ea typeface="Amiri" pitchFamily="2" charset="-78"/>
                 <a:cs typeface="Amiri" pitchFamily="2" charset="-78"/>
               </a:rPr>
               <a:t>مسجد</a:t>
@@ -33373,6 +33542,7 @@
                   <a:srgbClr val="9AA1AB"/>
                 </a:solidFill>
                 <a:latin typeface="Amiri" pitchFamily="2" charset="-78"/>
+                <a:ea typeface="Amiri" pitchFamily="2" charset="-78"/>
                 <a:cs typeface="Amiri" pitchFamily="2" charset="-78"/>
               </a:rPr>
               <a:t>مطعم</a:t>
@@ -33424,6 +33594,7 @@
                   <a:srgbClr val="8A6D1E"/>
                 </a:solidFill>
                 <a:latin typeface="Amiri" pitchFamily="2" charset="-78"/>
+                <a:ea typeface="Amiri" pitchFamily="2" charset="-78"/>
                 <a:cs typeface="Amiri" pitchFamily="2" charset="-78"/>
               </a:rPr>
               <a:t>ى</a:t>
@@ -34585,6 +34756,7 @@
                   <a:srgbClr val="D4AF37"/>
                 </a:solidFill>
                 <a:latin typeface="Amiri" pitchFamily="2" charset="-78"/>
+                <a:ea typeface="Amiri" pitchFamily="2" charset="-78"/>
                 <a:cs typeface="Amiri" pitchFamily="2" charset="-78"/>
               </a:rPr>
               <a:t>م</a:t>
@@ -34905,6 +35077,7 @@
                   <a:srgbClr val="8A6D1E"/>
                 </a:solidFill>
                 <a:latin typeface="Amiri" pitchFamily="2" charset="-78"/>
+                <a:ea typeface="Amiri" pitchFamily="2" charset="-78"/>
                 <a:cs typeface="Amiri" pitchFamily="2" charset="-78"/>
               </a:rPr>
               <a:t>التَّحْضِيرُ لِلدَّرْسِ القَادِمِ</a:t>
@@ -35118,6 +35291,7 @@
                   <a:srgbClr val="1B3B6F"/>
                 </a:solidFill>
                 <a:latin typeface="Amiri" pitchFamily="2" charset="-78"/>
+                <a:ea typeface="Amiri" pitchFamily="2" charset="-78"/>
                 <a:cs typeface="Amiri" pitchFamily="2" charset="-78"/>
               </a:rPr>
               <a:t>العَرَبِيَّةُ</a:t>
@@ -35197,6 +35371,7 @@
                   <a:srgbClr val="1B3B6F"/>
                 </a:solidFill>
                 <a:latin typeface="Amiri" pitchFamily="2" charset="-78"/>
+                <a:ea typeface="Amiri" pitchFamily="2" charset="-78"/>
                 <a:cs typeface="Amiri" pitchFamily="2" charset="-78"/>
               </a:rPr>
               <a:t>لُغَةٌ</a:t>
@@ -35243,11 +35418,12 @@
               <a:buNone/>
             </a:pPr>
             <a:r>
-              <a:rPr lang="en-US" sz="1000" i="1" dirty="0">
+              <a:rPr lang="ar-SA" sz="1000" i="1" dirty="0">
                 <a:solidFill>
                   <a:srgbClr val="5A6472"/>
                 </a:solidFill>
                 <a:latin typeface="Calibri" pitchFamily="34" charset="0"/>
+                <a:ea typeface="Amiri" pitchFamily="2" charset="-78"/>
                 <a:cs typeface="Amiri" pitchFamily="2" charset="-78"/>
               </a:rPr>
               <a:t>  pl. لُغَاتٌ</a:t>
@@ -35286,6 +35462,7 @@
                   <a:srgbClr val="1B3B6F"/>
                 </a:solidFill>
                 <a:latin typeface="Amiri" pitchFamily="2" charset="-78"/>
+                <a:ea typeface="Amiri" pitchFamily="2" charset="-78"/>
                 <a:cs typeface="Amiri" pitchFamily="2" charset="-78"/>
               </a:rPr>
               <a:t>خَطٌّ</a:t>
@@ -35332,11 +35509,12 @@
               <a:buNone/>
             </a:pPr>
             <a:r>
-              <a:rPr lang="en-US" sz="1000" i="1" dirty="0">
+              <a:rPr lang="ar-SA" sz="1000" i="1" dirty="0">
                 <a:solidFill>
                   <a:srgbClr val="5A6472"/>
                 </a:solidFill>
                 <a:latin typeface="Calibri" pitchFamily="34" charset="0"/>
+                <a:ea typeface="Amiri" pitchFamily="2" charset="-78"/>
                 <a:cs typeface="Amiri" pitchFamily="2" charset="-78"/>
               </a:rPr>
               <a:t>  pl. خُطُوطٌ</a:t>
@@ -35375,6 +35553,7 @@
                   <a:srgbClr val="1B3B6F"/>
                 </a:solidFill>
                 <a:latin typeface="Amiri" pitchFamily="2" charset="-78"/>
+                <a:ea typeface="Amiri" pitchFamily="2" charset="-78"/>
                 <a:cs typeface="Amiri" pitchFamily="2" charset="-78"/>
               </a:rPr>
               <a:t>بَلَدٌ</a:t>
@@ -35421,11 +35600,12 @@
               <a:buNone/>
             </a:pPr>
             <a:r>
-              <a:rPr lang="en-US" sz="1000" i="1" dirty="0">
+              <a:rPr lang="ar-SA" sz="1000" i="1" dirty="0">
                 <a:solidFill>
                   <a:srgbClr val="5A6472"/>
                 </a:solidFill>
                 <a:latin typeface="Calibri" pitchFamily="34" charset="0"/>
+                <a:ea typeface="Amiri" pitchFamily="2" charset="-78"/>
                 <a:cs typeface="Amiri" pitchFamily="2" charset="-78"/>
               </a:rPr>
               <a:t>  pl. بُلْدَانٌ</a:t>
@@ -35464,6 +35644,7 @@
                   <a:srgbClr val="1B3B6F"/>
                 </a:solidFill>
                 <a:latin typeface="Amiri" pitchFamily="2" charset="-78"/>
+                <a:ea typeface="Amiri" pitchFamily="2" charset="-78"/>
                 <a:cs typeface="Amiri" pitchFamily="2" charset="-78"/>
               </a:rPr>
               <a:t>لَافِتَةٌ</a:t>
@@ -35510,11 +35691,12 @@
               <a:buNone/>
             </a:pPr>
             <a:r>
-              <a:rPr lang="en-US" sz="1000" i="1" dirty="0">
+              <a:rPr lang="ar-SA" sz="1000" i="1" dirty="0">
                 <a:solidFill>
                   <a:srgbClr val="5A6472"/>
                 </a:solidFill>
                 <a:latin typeface="Calibri" pitchFamily="34" charset="0"/>
+                <a:ea typeface="Amiri" pitchFamily="2" charset="-78"/>
                 <a:cs typeface="Amiri" pitchFamily="2" charset="-78"/>
               </a:rPr>
               <a:t>  pl. لَافِتَاتٌ</a:t>
@@ -35629,6 +35811,7 @@
                   <a:srgbClr val="1B3B6F"/>
                 </a:solidFill>
                 <a:latin typeface="Amiri" pitchFamily="2" charset="-78"/>
+                <a:ea typeface="Amiri" pitchFamily="2" charset="-78"/>
                 <a:cs typeface="Amiri" pitchFamily="2" charset="-78"/>
               </a:rPr>
               <a:t>مطعم · مدرسة · مسجد</a:t>
@@ -36298,6 +36481,7 @@
                   <a:srgbClr val="FFFFFF"/>
                 </a:solidFill>
                 <a:latin typeface="Amiri" pitchFamily="2" charset="-78"/>
+                <a:ea typeface="Amiri" pitchFamily="2" charset="-78"/>
                 <a:cs typeface="Amiri" pitchFamily="2" charset="-78"/>
               </a:rPr>
               <a:t>أَحْسَنْتُمْ! إِلَى اللِّقَاءِ</a:t>
@@ -36450,6 +36634,7 @@
                   <a:srgbClr val="D4AF37"/>
                 </a:solidFill>
                 <a:latin typeface="Amiri" pitchFamily="2" charset="-78"/>
+                <a:ea typeface="Amiri" pitchFamily="2" charset="-78"/>
                 <a:cs typeface="Amiri" pitchFamily="2" charset="-78"/>
               </a:rPr>
               <a:t>خَطٌّ وَاحِدٌ، أَصْوَاتٌ كَثِيرَةٌ</a:t>
@@ -36583,6 +36768,7 @@
                   <a:srgbClr val="D4AF37"/>
                 </a:solidFill>
                 <a:latin typeface="Amiri" pitchFamily="2" charset="-78"/>
+                <a:ea typeface="Amiri" pitchFamily="2" charset="-78"/>
                 <a:cs typeface="Amiri" pitchFamily="2" charset="-78"/>
               </a:rPr>
               <a:t>م</a:t>
@@ -36903,6 +37089,7 @@
                   <a:srgbClr val="8A6D1E"/>
                 </a:solidFill>
                 <a:latin typeface="Amiri" pitchFamily="2" charset="-78"/>
+                <a:ea typeface="Amiri" pitchFamily="2" charset="-78"/>
                 <a:cs typeface="Amiri" pitchFamily="2" charset="-78"/>
               </a:rPr>
               <a:t>خَرِيطَةُ الدَّرْسِ</a:t>
@@ -37217,6 +37404,7 @@
                   <a:srgbClr val="0E7C86"/>
                 </a:solidFill>
                 <a:latin typeface="Amiri" pitchFamily="2" charset="-78"/>
+                <a:ea typeface="Amiri" pitchFamily="2" charset="-78"/>
                 <a:cs typeface="Amiri" pitchFamily="2" charset="-78"/>
               </a:rPr>
               <a:t>اِبْدَأِ الآنَ</a:t>
@@ -37493,6 +37681,7 @@
                   <a:srgbClr val="1B3B6F"/>
                 </a:solidFill>
                 <a:latin typeface="Amiri" pitchFamily="2" charset="-78"/>
+                <a:ea typeface="Amiri" pitchFamily="2" charset="-78"/>
                 <a:cs typeface="Amiri" pitchFamily="2" charset="-78"/>
               </a:rPr>
               <a:t>كَلِمَاتٌ وَقَوَاعِدُ</a:t>
@@ -37769,6 +37958,7 @@
                   <a:srgbClr val="6B4C9A"/>
                 </a:solidFill>
                 <a:latin typeface="Amiri" pitchFamily="2" charset="-78"/>
+                <a:ea typeface="Amiri" pitchFamily="2" charset="-78"/>
                 <a:cs typeface="Amiri" pitchFamily="2" charset="-78"/>
               </a:rPr>
               <a:t>شَاهِدْ</a:t>
@@ -38045,6 +38235,7 @@
                   <a:srgbClr val="2F6FB0"/>
                 </a:solidFill>
                 <a:latin typeface="Amiri" pitchFamily="2" charset="-78"/>
+                <a:ea typeface="Amiri" pitchFamily="2" charset="-78"/>
                 <a:cs typeface="Amiri" pitchFamily="2" charset="-78"/>
               </a:rPr>
               <a:t>مَعًا</a:t>
@@ -38321,6 +38512,7 @@
                   <a:srgbClr val="1E6B52"/>
                 </a:solidFill>
                 <a:latin typeface="Amiri" pitchFamily="2" charset="-78"/>
+                <a:ea typeface="Amiri" pitchFamily="2" charset="-78"/>
                 <a:cs typeface="Amiri" pitchFamily="2" charset="-78"/>
               </a:rPr>
               <a:t>وَحْدَكَ</a:t>
@@ -38597,6 +38789,7 @@
                   <a:srgbClr val="8A6D1E"/>
                 </a:solidFill>
                 <a:latin typeface="Amiri" pitchFamily="2" charset="-78"/>
+                <a:ea typeface="Amiri" pitchFamily="2" charset="-78"/>
                 <a:cs typeface="Amiri" pitchFamily="2" charset="-78"/>
               </a:rPr>
               <a:t>قَيِّمْ عَمَلَكَ</a:t>
@@ -38873,6 +39066,7 @@
                   <a:srgbClr val="C45A3C"/>
                 </a:solidFill>
                 <a:latin typeface="Amiri" pitchFamily="2" charset="-78"/>
+                <a:ea typeface="Amiri" pitchFamily="2" charset="-78"/>
                 <a:cs typeface="Amiri" pitchFamily="2" charset="-78"/>
               </a:rPr>
               <a:t>اِسْتَعِدَّ</a:t>
@@ -39116,6 +39310,7 @@
                   <a:srgbClr val="D4AF37"/>
                 </a:solidFill>
                 <a:latin typeface="Amiri" pitchFamily="2" charset="-78"/>
+                <a:ea typeface="Amiri" pitchFamily="2" charset="-78"/>
                 <a:cs typeface="Amiri" pitchFamily="2" charset="-78"/>
               </a:rPr>
               <a:t>م</a:t>
@@ -39436,6 +39631,7 @@
                   <a:srgbClr val="8A6D1E"/>
                 </a:solidFill>
                 <a:latin typeface="Amiri" pitchFamily="2" charset="-78"/>
+                <a:ea typeface="Amiri" pitchFamily="2" charset="-78"/>
                 <a:cs typeface="Amiri" pitchFamily="2" charset="-78"/>
               </a:rPr>
               <a:t>اِبْدَأِ الآنَ</a:t>
@@ -39622,6 +39818,7 @@
                   <a:srgbClr val="1B3B6F"/>
                 </a:solidFill>
                 <a:latin typeface="Amiri" pitchFamily="2" charset="-78"/>
+                <a:ea typeface="Amiri" pitchFamily="2" charset="-78"/>
                 <a:cs typeface="Amiri" pitchFamily="2" charset="-78"/>
               </a:rPr>
               <a:t>ب</a:t>
@@ -39648,6 +39845,7 @@
                   <a:srgbClr val="1B3B6F"/>
                 </a:solidFill>
                 <a:latin typeface="Amiri" pitchFamily="2" charset="-78"/>
+                <a:ea typeface="Amiri" pitchFamily="2" charset="-78"/>
                 <a:cs typeface="Amiri" pitchFamily="2" charset="-78"/>
               </a:rPr>
               <a:t>ت</a:t>
@@ -40200,6 +40398,7 @@
                   <a:srgbClr val="1F2A37"/>
                 </a:solidFill>
                 <a:latin typeface="Amiri" pitchFamily="2" charset="-78"/>
+                <a:ea typeface="Amiri" pitchFamily="2" charset="-78"/>
                 <a:cs typeface="Amiri" pitchFamily="2" charset="-78"/>
               </a:rPr>
               <a:t>ا د ذ ر ز و</a:t>
@@ -40301,6 +40500,7 @@
                   <a:srgbClr val="1F2A37"/>
                 </a:solidFill>
                 <a:latin typeface="Amiri" pitchFamily="2" charset="-78"/>
+                <a:ea typeface="Amiri" pitchFamily="2" charset="-78"/>
                 <a:cs typeface="Amiri" pitchFamily="2" charset="-78"/>
               </a:rPr>
               <a:t>ب ت ث ن ي</a:t>
@@ -40887,6 +41087,7 @@
                   <a:srgbClr val="1B3B6F"/>
                 </a:solidFill>
                 <a:latin typeface="Amiri" pitchFamily="2" charset="-78"/>
+                <a:ea typeface="Amiri" pitchFamily="2" charset="-78"/>
                 <a:cs typeface="Amiri" pitchFamily="2" charset="-78"/>
               </a:rPr>
               <a:t>مدرسة</a:t>
@@ -41351,6 +41552,7 @@
                   <a:srgbClr val="1B3B6F"/>
                 </a:solidFill>
                 <a:latin typeface="Amiri" pitchFamily="2" charset="-78"/>
+                <a:ea typeface="Amiri" pitchFamily="2" charset="-78"/>
                 <a:cs typeface="Amiri" pitchFamily="2" charset="-78"/>
               </a:rPr>
               <a:t>مغلق</a:t>
@@ -42002,6 +42204,7 @@
                   <a:srgbClr val="D4AF37"/>
                 </a:solidFill>
                 <a:latin typeface="Amiri" pitchFamily="2" charset="-78"/>
+                <a:ea typeface="Amiri" pitchFamily="2" charset="-78"/>
                 <a:cs typeface="Amiri" pitchFamily="2" charset="-78"/>
               </a:rPr>
               <a:t>م</a:t>
@@ -42322,6 +42525,7 @@
                   <a:srgbClr val="8A6D1E"/>
                 </a:solidFill>
                 <a:latin typeface="Amiri" pitchFamily="2" charset="-78"/>
+                <a:ea typeface="Amiri" pitchFamily="2" charset="-78"/>
                 <a:cs typeface="Amiri" pitchFamily="2" charset="-78"/>
               </a:rPr>
               <a:t>الإِجَابَاتُ وَالتَّعْلِيلُ</a:t>
@@ -42508,6 +42712,7 @@
                   <a:srgbClr val="1B3B6F"/>
                 </a:solidFill>
                 <a:latin typeface="Amiri" pitchFamily="2" charset="-78"/>
+                <a:ea typeface="Amiri" pitchFamily="2" charset="-78"/>
                 <a:cs typeface="Amiri" pitchFamily="2" charset="-78"/>
               </a:rPr>
               <a:t>ب</a:t>
@@ -42534,6 +42739,7 @@
                   <a:srgbClr val="1B3B6F"/>
                 </a:solidFill>
                 <a:latin typeface="Amiri" pitchFamily="2" charset="-78"/>
+                <a:ea typeface="Amiri" pitchFamily="2" charset="-78"/>
                 <a:cs typeface="Amiri" pitchFamily="2" charset="-78"/>
               </a:rPr>
               <a:t>ت</a:t>
@@ -43178,6 +43384,7 @@
                   <a:srgbClr val="1F2A37"/>
                 </a:solidFill>
                 <a:latin typeface="Amiri" pitchFamily="2" charset="-78"/>
+                <a:ea typeface="Amiri" pitchFamily="2" charset="-78"/>
                 <a:cs typeface="Amiri" pitchFamily="2" charset="-78"/>
               </a:rPr>
               <a:t>ا د ذ ر ز و</a:t>
@@ -43279,6 +43486,7 @@
                   <a:srgbClr val="9AA1AB"/>
                 </a:solidFill>
                 <a:latin typeface="Amiri" pitchFamily="2" charset="-78"/>
+                <a:ea typeface="Amiri" pitchFamily="2" charset="-78"/>
                 <a:cs typeface="Amiri" pitchFamily="2" charset="-78"/>
               </a:rPr>
               <a:t>ب ت ث ن ي</a:t>
@@ -43968,6 +44176,7 @@
                   <a:srgbClr val="1B3B6F"/>
                 </a:solidFill>
                 <a:latin typeface="Amiri" pitchFamily="2" charset="-78"/>
+                <a:ea typeface="Amiri" pitchFamily="2" charset="-78"/>
                 <a:cs typeface="Amiri" pitchFamily="2" charset="-78"/>
               </a:rPr>
               <a:t>مدرسة</a:t>
@@ -44362,6 +44571,7 @@
                   <a:srgbClr val="8A6D1E"/>
                 </a:solidFill>
                 <a:latin typeface="Amiri" pitchFamily="2" charset="-78"/>
+                <a:ea typeface="Amiri" pitchFamily="2" charset="-78"/>
                 <a:cs typeface="Amiri" pitchFamily="2" charset="-78"/>
               </a:rPr>
               <a:t>مَدْرَسَةٌ</a:t>
@@ -44523,6 +44733,7 @@
                   <a:srgbClr val="1B3B6F"/>
                 </a:solidFill>
                 <a:latin typeface="Amiri" pitchFamily="2" charset="-78"/>
+                <a:ea typeface="Amiri" pitchFamily="2" charset="-78"/>
                 <a:cs typeface="Amiri" pitchFamily="2" charset="-78"/>
               </a:rPr>
               <a:t>مغلق</a:t>
@@ -44917,6 +45128,7 @@
                   <a:srgbClr val="8A6D1E"/>
                 </a:solidFill>
                 <a:latin typeface="Amiri" pitchFamily="2" charset="-78"/>
+                <a:ea typeface="Amiri" pitchFamily="2" charset="-78"/>
                 <a:cs typeface="Amiri" pitchFamily="2" charset="-78"/>
               </a:rPr>
               <a:t>مُغْلَقٌ</a:t>
@@ -44943,6 +45155,7 @@
                   <a:srgbClr val="8A6D1E"/>
                 </a:solidFill>
                 <a:latin typeface="Amiri" pitchFamily="2" charset="-78"/>
+                <a:ea typeface="Amiri" pitchFamily="2" charset="-78"/>
                 <a:cs typeface="Amiri" pitchFamily="2" charset="-78"/>
               </a:rPr>
               <a:t>مَفْتُوحٌ</a:t>
@@ -45104,6 +45317,7 @@
                   <a:srgbClr val="1B3B6F"/>
                 </a:solidFill>
                 <a:latin typeface="Amiri" pitchFamily="2" charset="-78"/>
+                <a:ea typeface="Amiri" pitchFamily="2" charset="-78"/>
                 <a:cs typeface="Amiri" pitchFamily="2" charset="-78"/>
               </a:rPr>
               <a:t>مدرسة ← مَدْرَسَة</a:t>
@@ -45237,6 +45451,7 @@
                   <a:srgbClr val="D4AF37"/>
                 </a:solidFill>
                 <a:latin typeface="Amiri" pitchFamily="2" charset="-78"/>
+                <a:ea typeface="Amiri" pitchFamily="2" charset="-78"/>
                 <a:cs typeface="Amiri" pitchFamily="2" charset="-78"/>
               </a:rPr>
               <a:t>م</a:t>
@@ -45557,6 +45772,7 @@
                   <a:srgbClr val="8A6D1E"/>
                 </a:solidFill>
                 <a:latin typeface="Amiri" pitchFamily="2" charset="-78"/>
+                <a:ea typeface="Amiri" pitchFamily="2" charset="-78"/>
                 <a:cs typeface="Amiri" pitchFamily="2" charset="-78"/>
               </a:rPr>
               <a:t>الأَهْدَافُ وَمَعَايِيرُ النَّجَاحِ</a:t>
@@ -45705,6 +45921,7 @@
                   <a:srgbClr val="8A6D1E"/>
                 </a:solidFill>
                 <a:latin typeface="Amiri" pitchFamily="2" charset="-78"/>
+                <a:ea typeface="Amiri" pitchFamily="2" charset="-78"/>
                 <a:cs typeface="Amiri" pitchFamily="2" charset="-78"/>
               </a:rPr>
               <a:t>سَتَتَعَلَّمُ اليَوْمَ</a:t>
@@ -46702,6 +46919,7 @@
                   <a:srgbClr val="B83227"/>
                 </a:solidFill>
                 <a:latin typeface="Amiri" pitchFamily="2" charset="-78"/>
+                <a:ea typeface="Amiri" pitchFamily="2" charset="-78"/>
                 <a:cs typeface="Amiri" pitchFamily="2" charset="-78"/>
               </a:rPr>
               <a:t>كَتَبَ / كُتُب / كُتِبَ</a:t>
@@ -46989,6 +47207,7 @@
                   <a:srgbClr val="D4AF37"/>
                 </a:solidFill>
                 <a:latin typeface="Amiri" pitchFamily="2" charset="-78"/>
+                <a:ea typeface="Amiri" pitchFamily="2" charset="-78"/>
                 <a:cs typeface="Amiri" pitchFamily="2" charset="-78"/>
               </a:rPr>
               <a:t>كَلِمَاتُ الدَّرْسِ</a:t>
@@ -47373,6 +47592,7 @@
                   <a:srgbClr val="1B3B6F"/>
                 </a:solidFill>
                 <a:latin typeface="Amiri" pitchFamily="2" charset="-78"/>
+                <a:ea typeface="Amiri" pitchFamily="2" charset="-78"/>
                 <a:cs typeface="Amiri" pitchFamily="2" charset="-78"/>
               </a:rPr>
               <a:t>مسجد</a:t>
@@ -47406,11 +47626,12 @@
               <a:buNone/>
             </a:pPr>
             <a:r>
-              <a:rPr lang="ur-PK" altLang="en-US" sz="1400" b="1" dirty="0">
+              <a:rPr lang="ar-SA" altLang="en-US" sz="1400" b="1" dirty="0">
                 <a:solidFill>
                   <a:srgbClr val="2E8B57"/>
                 </a:solidFill>
                 <a:latin typeface="Amiri" pitchFamily="2" charset="-78"/>
+                <a:ea typeface="Amiri" pitchFamily="2" charset="-78"/>
                 <a:cs typeface="Amiri" pitchFamily="2" charset="-78"/>
               </a:rPr>
               <a:t>‎مسجد‎ </a:t>
@@ -47462,6 +47683,7 @@
                   <a:srgbClr val="1B3B6F"/>
                 </a:solidFill>
                 <a:latin typeface="Amiri" pitchFamily="2" charset="-78"/>
+                <a:ea typeface="Amiri" pitchFamily="2" charset="-78"/>
                 <a:cs typeface="Amiri" pitchFamily="2" charset="-78"/>
               </a:rPr>
               <a:t>مدرسة</a:t>
@@ -47495,11 +47717,12 @@
               <a:buNone/>
             </a:pPr>
             <a:r>
-              <a:rPr lang="ur-PK" altLang="en-US" sz="1400" b="1" dirty="0">
+              <a:rPr lang="ar-SA" altLang="en-US" sz="1400" b="1" dirty="0">
                 <a:solidFill>
                   <a:srgbClr val="2E8B57"/>
                 </a:solidFill>
                 <a:latin typeface="Amiri" pitchFamily="2" charset="-78"/>
+                <a:ea typeface="Amiri" pitchFamily="2" charset="-78"/>
                 <a:cs typeface="Amiri" pitchFamily="2" charset="-78"/>
               </a:rPr>
               <a:t>‎مدرسہ‎ </a:t>
@@ -47551,6 +47774,7 @@
                   <a:srgbClr val="1B3B6F"/>
                 </a:solidFill>
                 <a:latin typeface="Amiri" pitchFamily="2" charset="-78"/>
+                <a:ea typeface="Amiri" pitchFamily="2" charset="-78"/>
                 <a:cs typeface="Amiri" pitchFamily="2" charset="-78"/>
               </a:rPr>
               <a:t>علم</a:t>
@@ -47584,11 +47808,12 @@
               <a:buNone/>
             </a:pPr>
             <a:r>
-              <a:rPr lang="ur-PK" altLang="en-US" sz="1400" b="1" dirty="0">
+              <a:rPr lang="ar-SA" altLang="en-US" sz="1400" b="1" dirty="0">
                 <a:solidFill>
                   <a:srgbClr val="2E8B57"/>
                 </a:solidFill>
                 <a:latin typeface="Amiri" pitchFamily="2" charset="-78"/>
+                <a:ea typeface="Amiri" pitchFamily="2" charset="-78"/>
                 <a:cs typeface="Amiri" pitchFamily="2" charset="-78"/>
               </a:rPr>
               <a:t>‎علم‎ </a:t>
@@ -47640,6 +47865,7 @@
                   <a:srgbClr val="1B3B6F"/>
                 </a:solidFill>
                 <a:latin typeface="Amiri" pitchFamily="2" charset="-78"/>
+                <a:ea typeface="Amiri" pitchFamily="2" charset="-78"/>
                 <a:cs typeface="Amiri" pitchFamily="2" charset="-78"/>
               </a:rPr>
               <a:t>كتب</a:t>
@@ -47673,11 +47899,12 @@
               <a:buNone/>
             </a:pPr>
             <a:r>
-              <a:rPr lang="ur-PK" altLang="en-US" sz="1400" b="1" dirty="0">
+              <a:rPr lang="ar-SA" altLang="en-US" sz="1400" b="1" dirty="0">
                 <a:solidFill>
                   <a:srgbClr val="2E8B57"/>
                 </a:solidFill>
                 <a:latin typeface="Amiri" pitchFamily="2" charset="-78"/>
+                <a:ea typeface="Amiri" pitchFamily="2" charset="-78"/>
                 <a:cs typeface="Amiri" pitchFamily="2" charset="-78"/>
               </a:rPr>
               <a:t>‎کتب‎ </a:t>
@@ -47729,6 +47956,7 @@
                   <a:srgbClr val="1B3B6F"/>
                 </a:solidFill>
                 <a:latin typeface="Amiri" pitchFamily="2" charset="-78"/>
+                <a:ea typeface="Amiri" pitchFamily="2" charset="-78"/>
                 <a:cs typeface="Amiri" pitchFamily="2" charset="-78"/>
               </a:rPr>
               <a:t>شارع</a:t>
@@ -47762,11 +47990,12 @@
               <a:buNone/>
             </a:pPr>
             <a:r>
-              <a:rPr lang="ur-PK" altLang="en-US" sz="1400" b="1" dirty="0">
+              <a:rPr lang="ar-SA" altLang="en-US" sz="1400" b="1" dirty="0">
                 <a:solidFill>
                   <a:srgbClr val="2E8B57"/>
                 </a:solidFill>
                 <a:latin typeface="Amiri" pitchFamily="2" charset="-78"/>
+                <a:ea typeface="Amiri" pitchFamily="2" charset="-78"/>
                 <a:cs typeface="Amiri" pitchFamily="2" charset="-78"/>
               </a:rPr>
               <a:t>‎شارع‎ </a:t>
@@ -47913,6 +48142,7 @@
                   <a:srgbClr val="D4AF37"/>
                 </a:solidFill>
                 <a:latin typeface="Amiri" pitchFamily="2" charset="-78"/>
+                <a:ea typeface="Amiri" pitchFamily="2" charset="-78"/>
                 <a:cs typeface="Amiri" pitchFamily="2" charset="-78"/>
               </a:rPr>
               <a:t>م</a:t>
@@ -48233,6 +48463,7 @@
                   <a:srgbClr val="8A6D1E"/>
                 </a:solidFill>
                 <a:latin typeface="Amiri" pitchFamily="2" charset="-78"/>
+                <a:ea typeface="Amiri" pitchFamily="2" charset="-78"/>
                 <a:cs typeface="Amiri" pitchFamily="2" charset="-78"/>
               </a:rPr>
               <a:t>مَاذَا يَبْقَى فِي الكَلِمَةِ؟</a:t>
@@ -48475,6 +48706,7 @@
                   <a:srgbClr val="1B3B6F"/>
                 </a:solidFill>
                 <a:latin typeface="Amiri" pitchFamily="2" charset="-78"/>
+                <a:ea typeface="Amiri" pitchFamily="2" charset="-78"/>
                 <a:cs typeface="Amiri" pitchFamily="2" charset="-78"/>
               </a:rPr>
               <a:t>مدرسة</a:t>
@@ -48513,6 +48745,7 @@
                   <a:srgbClr val="1B3B6F"/>
                 </a:solidFill>
                 <a:latin typeface="Amiri" pitchFamily="2" charset="-78"/>
+                <a:ea typeface="Amiri" pitchFamily="2" charset="-78"/>
                 <a:cs typeface="Amiri" pitchFamily="2" charset="-78"/>
               </a:rPr>
               <a:t>مَدْرَسَة</a:t>
@@ -48564,6 +48797,7 @@
                   <a:srgbClr val="5A6472"/>
                 </a:solidFill>
                 <a:latin typeface="Amiri" pitchFamily="2" charset="-78"/>
+                <a:ea typeface="Amiri" pitchFamily="2" charset="-78"/>
                 <a:cs typeface="Amiri" pitchFamily="2" charset="-78"/>
               </a:rPr>
               <a:t>ة</a:t>
@@ -48694,6 +48928,7 @@
                   <a:srgbClr val="1B3B6F"/>
                 </a:solidFill>
                 <a:latin typeface="Amiri" pitchFamily="2" charset="-78"/>
+                <a:ea typeface="Amiri" pitchFamily="2" charset="-78"/>
                 <a:cs typeface="Amiri" pitchFamily="2" charset="-78"/>
               </a:rPr>
               <a:t>شارع</a:t>
@@ -48732,6 +48967,7 @@
                   <a:srgbClr val="1B3B6F"/>
                 </a:solidFill>
                 <a:latin typeface="Amiri" pitchFamily="2" charset="-78"/>
+                <a:ea typeface="Amiri" pitchFamily="2" charset="-78"/>
                 <a:cs typeface="Amiri" pitchFamily="2" charset="-78"/>
               </a:rPr>
               <a:t>شَارِع</a:t>
@@ -48900,6 +49136,7 @@
                   <a:srgbClr val="1B3B6F"/>
                 </a:solidFill>
                 <a:latin typeface="Amiri" pitchFamily="2" charset="-78"/>
+                <a:ea typeface="Amiri" pitchFamily="2" charset="-78"/>
                 <a:cs typeface="Amiri" pitchFamily="2" charset="-78"/>
               </a:rPr>
               <a:t>فندق</a:t>
@@ -48938,6 +49175,7 @@
                   <a:srgbClr val="1B3B6F"/>
                 </a:solidFill>
                 <a:latin typeface="Amiri" pitchFamily="2" charset="-78"/>
+                <a:ea typeface="Amiri" pitchFamily="2" charset="-78"/>
                 <a:cs typeface="Amiri" pitchFamily="2" charset="-78"/>
               </a:rPr>
               <a:t>فُنْدُق</a:t>
@@ -48989,6 +49227,7 @@
                   <a:srgbClr val="5A6472"/>
                 </a:solidFill>
                 <a:latin typeface="Amiri" pitchFamily="2" charset="-78"/>
+                <a:ea typeface="Amiri" pitchFamily="2" charset="-78"/>
                 <a:cs typeface="Amiri" pitchFamily="2" charset="-78"/>
               </a:rPr>
               <a:t>ف ن ق</a:t>
@@ -49132,6 +49371,7 @@
                   <a:srgbClr val="1B3B6F"/>
                 </a:solidFill>
                 <a:latin typeface="Amiri" pitchFamily="2" charset="-78"/>
+                <a:ea typeface="Amiri" pitchFamily="2" charset="-78"/>
                 <a:cs typeface="Amiri" pitchFamily="2" charset="-78"/>
               </a:rPr>
               <a:t>يقرأ</a:t>
@@ -49170,6 +49410,7 @@
                   <a:srgbClr val="1B3B6F"/>
                 </a:solidFill>
                 <a:latin typeface="Amiri" pitchFamily="2" charset="-78"/>
+                <a:ea typeface="Amiri" pitchFamily="2" charset="-78"/>
                 <a:cs typeface="Amiri" pitchFamily="2" charset="-78"/>
               </a:rPr>
               <a:t>يَقْرَأ</a:t>
@@ -49341,6 +49582,7 @@
                   <a:srgbClr val="D4AF37"/>
                 </a:solidFill>
                 <a:latin typeface="Amiri" pitchFamily="2" charset="-78"/>
+                <a:ea typeface="Amiri" pitchFamily="2" charset="-78"/>
                 <a:cs typeface="Amiri" pitchFamily="2" charset="-78"/>
               </a:rPr>
               <a:t>م</a:t>
@@ -49598,6 +49840,7 @@
                   <a:srgbClr val="1B3B6F"/>
                 </a:solidFill>
                 <a:latin typeface="Amiri" pitchFamily="2" charset="-78"/>
+                <a:ea typeface="Amiri" pitchFamily="2" charset="-78"/>
                 <a:cs typeface="Amiri" pitchFamily="2" charset="-78"/>
               </a:rPr>
               <a:t>المكتبة</a:t>
@@ -49674,6 +49917,7 @@
                   <a:srgbClr val="8A6D1E"/>
                 </a:solidFill>
                 <a:latin typeface="Amiri" pitchFamily="2" charset="-78"/>
+                <a:ea typeface="Amiri" pitchFamily="2" charset="-78"/>
                 <a:cs typeface="Amiri" pitchFamily="2" charset="-78"/>
               </a:rPr>
               <a:t>اِجْمَعِ الأَدِلَّةَ قَبْلَ القِرَاءَةِ</a:t>
@@ -49851,6 +50095,7 @@
                   <a:srgbClr val="FFFFFF"/>
                 </a:solidFill>
                 <a:latin typeface="Amiri" pitchFamily="2" charset="-78"/>
+                <a:ea typeface="Amiri" pitchFamily="2" charset="-78"/>
                 <a:cs typeface="Amiri" pitchFamily="2" charset="-78"/>
               </a:rPr>
               <a:t>المكتبة</a:t>
@@ -49992,6 +50237,7 @@
                   <a:srgbClr val="5A6472"/>
                 </a:solidFill>
                 <a:latin typeface="Amiri" pitchFamily="2" charset="-78"/>
+                <a:ea typeface="Amiri" pitchFamily="2" charset="-78"/>
                 <a:cs typeface="Amiri" pitchFamily="2" charset="-78"/>
               </a:rPr>
               <a:t>ا ل م ك ت ب ة</a:t>
@@ -50186,6 +50432,7 @@
                   <a:srgbClr val="5A6472"/>
                 </a:solidFill>
                 <a:latin typeface="Amiri" pitchFamily="2" charset="-78"/>
+                <a:ea typeface="Amiri" pitchFamily="2" charset="-78"/>
                 <a:cs typeface="Amiri" pitchFamily="2" charset="-78"/>
               </a:rPr>
               <a:t>ال ، و ، بـ ، ة ، ات</a:t>
@@ -50237,6 +50484,7 @@
                   <a:srgbClr val="1B3B6F"/>
                 </a:solidFill>
                 <a:latin typeface="Amiri" pitchFamily="2" charset="-78"/>
+                <a:ea typeface="Amiri" pitchFamily="2" charset="-78"/>
                 <a:cs typeface="Amiri" pitchFamily="2" charset="-78"/>
               </a:rPr>
               <a:t>ال + مكتب + ة</a:t>
@@ -50418,6 +50666,7 @@
                   <a:srgbClr val="5A6472"/>
                 </a:solidFill>
                 <a:latin typeface="Amiri" pitchFamily="2" charset="-78"/>
+                <a:ea typeface="Amiri" pitchFamily="2" charset="-78"/>
                 <a:cs typeface="Amiri" pitchFamily="2" charset="-78"/>
               </a:rPr>
               <a:t>ا و ي</a:t>
@@ -50482,6 +50731,7 @@
                   <a:srgbClr val="5A6472"/>
                 </a:solidFill>
                 <a:latin typeface="Amiri" pitchFamily="2" charset="-78"/>
+                <a:ea typeface="Amiri" pitchFamily="2" charset="-78"/>
                 <a:cs typeface="Amiri" pitchFamily="2" charset="-78"/>
               </a:rPr>
               <a:t>مكتب</a:t>
@@ -50894,6 +51144,7 @@
                   <a:srgbClr val="5A6472"/>
                 </a:solidFill>
                 <a:latin typeface="Amiri" pitchFamily="2" charset="-78"/>
+                <a:ea typeface="Amiri" pitchFamily="2" charset="-78"/>
                 <a:cs typeface="Amiri" pitchFamily="2" charset="-78"/>
               </a:rPr>
               <a:t>الْمَكْتَبَة</a:t>
@@ -51070,13 +51321,9 @@
     <a:fontScheme name="Office">
       <a:majorFont>
         <a:latin typeface="Calibri Light" panose="020F0302020204030204"/>
-        <a:ea typeface=""/>
-        <a:cs typeface=""/>
-        <a:font script="Jpan" typeface="游ゴシック Light"/>
-        <a:font script="Hang" typeface="맑은 고딕"/>
-        <a:font script="Hans" typeface="等线 Light"/>
-        <a:font script="Hant" typeface="新細明體"/>
-        <a:font script="Arab" typeface="Times New Roman"/>
+        <a:ea typeface="Amiri" pitchFamily="2" charset="-78"/>
+        <a:cs typeface="Amiri" pitchFamily="2" charset="-78"/>
+        <a:font script="Arab" typeface="Amiri"/>
         <a:font script="Hebr" typeface="Times New Roman"/>
         <a:font script="Thai" typeface="Angsana New"/>
         <a:font script="Ethi" typeface="Nyala"/>
@@ -51122,13 +51369,9 @@
       </a:majorFont>
       <a:minorFont>
         <a:latin typeface="Calibri" panose="020F0502020204030204"/>
-        <a:ea typeface=""/>
-        <a:cs typeface=""/>
-        <a:font script="Jpan" typeface="游ゴシック"/>
-        <a:font script="Hang" typeface="맑은 고딕"/>
-        <a:font script="Hans" typeface="等线"/>
-        <a:font script="Hant" typeface="新細明體"/>
-        <a:font script="Arab" typeface="Arial"/>
+        <a:ea typeface="Amiri" pitchFamily="2" charset="-78"/>
+        <a:cs typeface="Amiri" pitchFamily="2" charset="-78"/>
+        <a:font script="Arab" typeface="Amiri"/>
         <a:font script="Hebr" typeface="Arial"/>
         <a:font script="Thai" typeface="Cordia New"/>
         <a:font script="Ethi" typeface="Nyala"/>
